--- a/.company/newbiz/pitches/marunage-ai-deck.pptx
+++ b/.company/newbiz/pitches/marunage-ai-deck.pptx
@@ -1925,9 +1925,9 @@
                 <a:solidFill>
                   <a:srgbClr val="FFFFFF"/>
                 </a:solidFill>
-                <a:latin typeface="Arial Black" pitchFamily="34" charset="0"/>
-                <a:ea typeface="Arial Black" pitchFamily="34" charset="-122"/>
-                <a:cs typeface="Arial Black" pitchFamily="34" charset="-120"/>
+                <a:latin typeface="Noto Sans JP" pitchFamily="34" charset="0"/>
+                <a:ea typeface="Noto Sans JP" pitchFamily="34" charset="-122"/>
+                <a:cs typeface="Noto Sans JP" pitchFamily="34" charset="-120"/>
               </a:rPr>
               <a:t>まるなげAI</a:t>
             </a:r>
@@ -1964,9 +1964,9 @@
                 <a:solidFill>
                   <a:srgbClr val="CADCFC"/>
                 </a:solidFill>
-                <a:latin typeface="Arial" pitchFamily="34" charset="0"/>
-                <a:ea typeface="Arial" pitchFamily="34" charset="-122"/>
-                <a:cs typeface="Arial" pitchFamily="34" charset="-120"/>
+                <a:latin typeface="Noto Sans JP" pitchFamily="34" charset="0"/>
+                <a:ea typeface="Noto Sans JP" pitchFamily="34" charset="-122"/>
+                <a:cs typeface="Noto Sans JP" pitchFamily="34" charset="-120"/>
               </a:rPr>
               <a:t>LINEで話しかけるだけのAI秘書SaaS</a:t>
             </a:r>
@@ -2023,9 +2023,9 @@
                 <a:solidFill>
                   <a:srgbClr val="8892A0"/>
                 </a:solidFill>
-                <a:latin typeface="Arial" pitchFamily="34" charset="0"/>
-                <a:ea typeface="Arial" pitchFamily="34" charset="-122"/>
-                <a:cs typeface="Arial" pitchFamily="34" charset="-120"/>
+                <a:latin typeface="Noto Sans JP" pitchFamily="34" charset="0"/>
+                <a:ea typeface="Noto Sans JP" pitchFamily="34" charset="-122"/>
+                <a:cs typeface="Noto Sans JP" pitchFamily="34" charset="-120"/>
               </a:rPr>
               <a:t>事業計画書 — 2026年3月</a:t>
             </a:r>
@@ -2062,9 +2062,9 @@
                 <a:solidFill>
                   <a:srgbClr val="B0BAC9"/>
                 </a:solidFill>
-                <a:latin typeface="Arial" pitchFamily="34" charset="0"/>
-                <a:ea typeface="Arial" pitchFamily="34" charset="-122"/>
-                <a:cs typeface="Arial" pitchFamily="34" charset="-120"/>
+                <a:latin typeface="Noto Sans JP" pitchFamily="34" charset="0"/>
+                <a:ea typeface="Noto Sans JP" pitchFamily="34" charset="-122"/>
+                <a:cs typeface="Noto Sans JP" pitchFamily="34" charset="-120"/>
               </a:rPr>
               <a:t>「人を雇うほどじゃないけど、自分一人では回らない」</a:t>
             </a:r>
@@ -2079,9 +2079,9 @@
                 <a:solidFill>
                   <a:srgbClr val="B0BAC9"/>
                 </a:solidFill>
-                <a:latin typeface="Arial" pitchFamily="34" charset="0"/>
-                <a:ea typeface="Arial" pitchFamily="34" charset="-122"/>
-                <a:cs typeface="Arial" pitchFamily="34" charset="-120"/>
+                <a:latin typeface="Noto Sans JP" pitchFamily="34" charset="0"/>
+                <a:ea typeface="Noto Sans JP" pitchFamily="34" charset="-122"/>
+                <a:cs typeface="Noto Sans JP" pitchFamily="34" charset="-120"/>
               </a:rPr>
               <a:t>フリーランス・個人事業主209万人の業務課題をAIで解決する</a:t>
             </a:r>
@@ -2150,9 +2150,9 @@
                 <a:solidFill>
                   <a:srgbClr val="FFFFFF"/>
                 </a:solidFill>
-                <a:latin typeface="Arial" pitchFamily="34" charset="0"/>
-                <a:ea typeface="Arial" pitchFamily="34" charset="-122"/>
-                <a:cs typeface="Arial" pitchFamily="34" charset="-120"/>
+                <a:latin typeface="Noto Sans JP" pitchFamily="34" charset="0"/>
+                <a:ea typeface="Noto Sans JP" pitchFamily="34" charset="-122"/>
+                <a:cs typeface="Noto Sans JP" pitchFamily="34" charset="-120"/>
               </a:rPr>
               <a:t>実行スケジュール</a:t>
             </a:r>
@@ -2836,9 +2836,9 @@
                 <a:solidFill>
                   <a:srgbClr val="CADCFC"/>
                 </a:solidFill>
-                <a:latin typeface="Arial" pitchFamily="34" charset="0"/>
-                <a:ea typeface="Arial" pitchFamily="34" charset="-122"/>
-                <a:cs typeface="Arial" pitchFamily="34" charset="-120"/>
+                <a:latin typeface="Noto Sans JP" pitchFamily="34" charset="0"/>
+                <a:ea typeface="Noto Sans JP" pitchFamily="34" charset="-122"/>
+                <a:cs typeface="Noto Sans JP" pitchFamily="34" charset="-120"/>
               </a:rPr>
               <a:t>技術基盤（LINE↔Claude連携・SNS自動投稿・カレンダー連携）は既に構築・運用済み</a:t>
             </a:r>
@@ -2907,9 +2907,9 @@
                 <a:solidFill>
                   <a:srgbClr val="FFFFFF"/>
                 </a:solidFill>
-                <a:latin typeface="Arial" pitchFamily="34" charset="0"/>
-                <a:ea typeface="Arial" pitchFamily="34" charset="-122"/>
-                <a:cs typeface="Arial" pitchFamily="34" charset="-120"/>
+                <a:latin typeface="Noto Sans JP" pitchFamily="34" charset="0"/>
+                <a:ea typeface="Noto Sans JP" pitchFamily="34" charset="-122"/>
+                <a:cs typeface="Noto Sans JP" pitchFamily="34" charset="-120"/>
               </a:rPr>
               <a:t>チーム &amp; 投資計画</a:t>
             </a:r>
@@ -3010,9 +3010,9 @@
                 <a:solidFill>
                   <a:srgbClr val="CADCFC"/>
                 </a:solidFill>
-                <a:latin typeface="Arial" pitchFamily="34" charset="0"/>
-                <a:ea typeface="Arial" pitchFamily="34" charset="-122"/>
-                <a:cs typeface="Arial" pitchFamily="34" charset="-120"/>
+                <a:latin typeface="Noto Sans JP" pitchFamily="34" charset="0"/>
+                <a:ea typeface="Noto Sans JP" pitchFamily="34" charset="-122"/>
+                <a:cs typeface="Noto Sans JP" pitchFamily="34" charset="-120"/>
               </a:rPr>
               <a:t>LINE ↔ Claude Code 双方向連携</a:t>
             </a:r>
@@ -3028,9 +3028,9 @@
                 <a:solidFill>
                   <a:srgbClr val="CADCFC"/>
                 </a:solidFill>
-                <a:latin typeface="Arial" pitchFamily="34" charset="0"/>
-                <a:ea typeface="Arial" pitchFamily="34" charset="-122"/>
-                <a:cs typeface="Arial" pitchFamily="34" charset="-120"/>
+                <a:latin typeface="Noto Sans JP" pitchFamily="34" charset="0"/>
+                <a:ea typeface="Noto Sans JP" pitchFamily="34" charset="-122"/>
+                <a:cs typeface="Noto Sans JP" pitchFamily="34" charset="-120"/>
               </a:rPr>
               <a:t>仮想組織AI（8部門・自律運用中）</a:t>
             </a:r>
@@ -3046,9 +3046,9 @@
                 <a:solidFill>
                   <a:srgbClr val="CADCFC"/>
                 </a:solidFill>
-                <a:latin typeface="Arial" pitchFamily="34" charset="0"/>
-                <a:ea typeface="Arial" pitchFamily="34" charset="-122"/>
-                <a:cs typeface="Arial" pitchFamily="34" charset="-120"/>
+                <a:latin typeface="Noto Sans JP" pitchFamily="34" charset="0"/>
+                <a:ea typeface="Noto Sans JP" pitchFamily="34" charset="-122"/>
+                <a:cs typeface="Noto Sans JP" pitchFamily="34" charset="-120"/>
               </a:rPr>
               <a:t>note.com / Threads 自動投稿</a:t>
             </a:r>
@@ -3064,9 +3064,9 @@
                 <a:solidFill>
                   <a:srgbClr val="CADCFC"/>
                 </a:solidFill>
-                <a:latin typeface="Arial" pitchFamily="34" charset="0"/>
-                <a:ea typeface="Arial" pitchFamily="34" charset="-122"/>
-                <a:cs typeface="Arial" pitchFamily="34" charset="-120"/>
+                <a:latin typeface="Noto Sans JP" pitchFamily="34" charset="0"/>
+                <a:ea typeface="Noto Sans JP" pitchFamily="34" charset="-122"/>
+                <a:cs typeface="Noto Sans JP" pitchFamily="34" charset="-120"/>
               </a:rPr>
               <a:t>Googleカレンダー双方向連携</a:t>
             </a:r>
@@ -3082,9 +3082,9 @@
                 <a:solidFill>
                   <a:srgbClr val="CADCFC"/>
                 </a:solidFill>
-                <a:latin typeface="Arial" pitchFamily="34" charset="0"/>
-                <a:ea typeface="Arial" pitchFamily="34" charset="-122"/>
-                <a:cs typeface="Arial" pitchFamily="34" charset="-120"/>
+                <a:latin typeface="Noto Sans JP" pitchFamily="34" charset="0"/>
+                <a:ea typeface="Noto Sans JP" pitchFamily="34" charset="-122"/>
+                <a:cs typeface="Noto Sans JP" pitchFamily="34" charset="-120"/>
               </a:rPr>
               <a:t>ブラウザ自動操作基盤</a:t>
             </a:r>
@@ -3100,9 +3100,9 @@
                 <a:solidFill>
                   <a:srgbClr val="CADCFC"/>
                 </a:solidFill>
-                <a:latin typeface="Arial" pitchFamily="34" charset="0"/>
-                <a:ea typeface="Arial" pitchFamily="34" charset="-122"/>
-                <a:cs typeface="Arial" pitchFamily="34" charset="-120"/>
+                <a:latin typeface="Noto Sans JP" pitchFamily="34" charset="0"/>
+                <a:ea typeface="Noto Sans JP" pitchFamily="34" charset="-122"/>
+                <a:cs typeface="Noto Sans JP" pitchFamily="34" charset="-120"/>
               </a:rPr>
               <a:t>コマンド体系 &amp; 部門メンション</a:t>
             </a:r>
@@ -3202,9 +3202,9 @@
                 <a:solidFill>
                   <a:srgbClr val="FFFFFF"/>
                 </a:solidFill>
-                <a:latin typeface="Arial" pitchFamily="34" charset="0"/>
-                <a:ea typeface="Arial" pitchFamily="34" charset="-122"/>
-                <a:cs typeface="Arial" pitchFamily="34" charset="-120"/>
+                <a:latin typeface="Noto Sans JP" pitchFamily="34" charset="0"/>
+                <a:ea typeface="Noto Sans JP" pitchFamily="34" charset="-122"/>
+                <a:cs typeface="Noto Sans JP" pitchFamily="34" charset="-120"/>
               </a:rPr>
               <a:t>開発費（3ヶ月）</a:t>
             </a:r>
@@ -3219,9 +3219,9 @@
                 <a:solidFill>
                   <a:srgbClr val="CADCFC"/>
                 </a:solidFill>
-                <a:latin typeface="Arial" pitchFamily="34" charset="0"/>
-                <a:ea typeface="Arial" pitchFamily="34" charset="-122"/>
-                <a:cs typeface="Arial" pitchFamily="34" charset="-120"/>
+                <a:latin typeface="Noto Sans JP" pitchFamily="34" charset="0"/>
+                <a:ea typeface="Noto Sans JP" pitchFamily="34" charset="-122"/>
+                <a:cs typeface="Noto Sans JP" pitchFamily="34" charset="-120"/>
               </a:rPr>
               <a:t>¥0（自社リソースで開発）</a:t>
             </a:r>
@@ -3242,9 +3242,9 @@
                 <a:solidFill>
                   <a:srgbClr val="FFFFFF"/>
                 </a:solidFill>
-                <a:latin typeface="Arial" pitchFamily="34" charset="0"/>
-                <a:ea typeface="Arial" pitchFamily="34" charset="-122"/>
-                <a:cs typeface="Arial" pitchFamily="34" charset="-120"/>
+                <a:latin typeface="Noto Sans JP" pitchFamily="34" charset="0"/>
+                <a:ea typeface="Noto Sans JP" pitchFamily="34" charset="-122"/>
+                <a:cs typeface="Noto Sans JP" pitchFamily="34" charset="-120"/>
               </a:rPr>
               <a:t>マーケティング</a:t>
             </a:r>
@@ -3259,9 +3259,9 @@
                 <a:solidFill>
                   <a:srgbClr val="CADCFC"/>
                 </a:solidFill>
-                <a:latin typeface="Arial" pitchFamily="34" charset="0"/>
-                <a:ea typeface="Arial" pitchFamily="34" charset="-122"/>
-                <a:cs typeface="Arial" pitchFamily="34" charset="-120"/>
+                <a:latin typeface="Noto Sans JP" pitchFamily="34" charset="0"/>
+                <a:ea typeface="Noto Sans JP" pitchFamily="34" charset="-122"/>
+                <a:cs typeface="Noto Sans JP" pitchFamily="34" charset="-120"/>
               </a:rPr>
               <a:t>¥300,000（LP制作 + 広告費 3ヶ月分）</a:t>
             </a:r>
@@ -3282,9 +3282,9 @@
                 <a:solidFill>
                   <a:srgbClr val="FFFFFF"/>
                 </a:solidFill>
-                <a:latin typeface="Arial" pitchFamily="34" charset="0"/>
-                <a:ea typeface="Arial" pitchFamily="34" charset="-122"/>
-                <a:cs typeface="Arial" pitchFamily="34" charset="-120"/>
+                <a:latin typeface="Noto Sans JP" pitchFamily="34" charset="0"/>
+                <a:ea typeface="Noto Sans JP" pitchFamily="34" charset="-122"/>
+                <a:cs typeface="Noto Sans JP" pitchFamily="34" charset="-120"/>
               </a:rPr>
               <a:t>インフラ・API費</a:t>
             </a:r>
@@ -3299,9 +3299,9 @@
                 <a:solidFill>
                   <a:srgbClr val="CADCFC"/>
                 </a:solidFill>
-                <a:latin typeface="Arial" pitchFamily="34" charset="0"/>
-                <a:ea typeface="Arial" pitchFamily="34" charset="-122"/>
-                <a:cs typeface="Arial" pitchFamily="34" charset="-120"/>
+                <a:latin typeface="Noto Sans JP" pitchFamily="34" charset="0"/>
+                <a:ea typeface="Noto Sans JP" pitchFamily="34" charset="-122"/>
+                <a:cs typeface="Noto Sans JP" pitchFamily="34" charset="-120"/>
               </a:rPr>
               <a:t>¥50,000/月（Claude API + サーバー）</a:t>
             </a:r>
@@ -3322,9 +3322,9 @@
                 <a:solidFill>
                   <a:srgbClr val="4A90D9"/>
                 </a:solidFill>
-                <a:latin typeface="Arial" pitchFamily="34" charset="0"/>
-                <a:ea typeface="Arial" pitchFamily="34" charset="-122"/>
-                <a:cs typeface="Arial" pitchFamily="34" charset="-120"/>
+                <a:latin typeface="Noto Sans JP" pitchFamily="34" charset="0"/>
+                <a:ea typeface="Noto Sans JP" pitchFamily="34" charset="-122"/>
+                <a:cs typeface="Noto Sans JP" pitchFamily="34" charset="-120"/>
               </a:rPr>
               <a:t>合計初期投資: ¥500,000</a:t>
             </a:r>
@@ -3381,9 +3381,9 @@
                 <a:solidFill>
                   <a:srgbClr val="FFFFFF"/>
                 </a:solidFill>
-                <a:latin typeface="Arial" pitchFamily="34" charset="0"/>
-                <a:ea typeface="Arial" pitchFamily="34" charset="-122"/>
-                <a:cs typeface="Arial" pitchFamily="34" charset="-120"/>
+                <a:latin typeface="Noto Sans JP" pitchFamily="34" charset="0"/>
+                <a:ea typeface="Noto Sans JP" pitchFamily="34" charset="-122"/>
+                <a:cs typeface="Noto Sans JP" pitchFamily="34" charset="-120"/>
               </a:rPr>
               <a:t>投資回収シナリオ: </a:t>
             </a:r>
@@ -3395,9 +3395,9 @@
                 <a:solidFill>
                   <a:srgbClr val="FFFFFF"/>
                 </a:solidFill>
-                <a:latin typeface="Arial" pitchFamily="34" charset="0"/>
-                <a:ea typeface="Arial" pitchFamily="34" charset="-122"/>
-                <a:cs typeface="Arial" pitchFamily="34" charset="-120"/>
+                <a:latin typeface="Noto Sans JP" pitchFamily="34" charset="0"/>
+                <a:ea typeface="Noto Sans JP" pitchFamily="34" charset="-122"/>
+                <a:cs typeface="Noto Sans JP" pitchFamily="34" charset="-120"/>
               </a:rPr>
               <a:t>50人 × 平均月額12,000円 = 月商60万円（6ヶ月目目標）。累計投資50万円を6ヶ月目で回収。</a:t>
             </a:r>
@@ -3466,9 +3466,9 @@
                 <a:solidFill>
                   <a:srgbClr val="1E2761"/>
                 </a:solidFill>
-                <a:latin typeface="Arial" pitchFamily="34" charset="0"/>
-                <a:ea typeface="Arial" pitchFamily="34" charset="-122"/>
-                <a:cs typeface="Arial" pitchFamily="34" charset="-120"/>
+                <a:latin typeface="Noto Sans JP" pitchFamily="34" charset="0"/>
+                <a:ea typeface="Noto Sans JP" pitchFamily="34" charset="-122"/>
+                <a:cs typeface="Noto Sans JP" pitchFamily="34" charset="-120"/>
               </a:rPr>
               <a:t>出典・参考資料</a:t>
             </a:r>
@@ -3508,9 +3508,9 @@
                 <a:solidFill>
                   <a:srgbClr val="1A1A2E"/>
                 </a:solidFill>
-                <a:latin typeface="Arial" pitchFamily="34" charset="0"/>
-                <a:ea typeface="Arial" pitchFamily="34" charset="-122"/>
-                <a:cs typeface="Arial" pitchFamily="34" charset="-120"/>
+                <a:latin typeface="Noto Sans JP" pitchFamily="34" charset="0"/>
+                <a:ea typeface="Noto Sans JP" pitchFamily="34" charset="-122"/>
+                <a:cs typeface="Noto Sans JP" pitchFamily="34" charset="-120"/>
               </a:rPr>
               <a:t>1. 総務省「令和4年 就業構造基本調査」(2022) — フリーランス人口209万人</a:t>
             </a:r>
@@ -3528,9 +3528,9 @@
                 <a:solidFill>
                   <a:srgbClr val="1A1A2E"/>
                 </a:solidFill>
-                <a:latin typeface="Arial" pitchFamily="34" charset="0"/>
-                <a:ea typeface="Arial" pitchFamily="34" charset="-122"/>
-                <a:cs typeface="Arial" pitchFamily="34" charset="-120"/>
+                <a:latin typeface="Noto Sans JP" pitchFamily="34" charset="0"/>
+                <a:ea typeface="Noto Sans JP" pitchFamily="34" charset="-122"/>
+                <a:cs typeface="Noto Sans JP" pitchFamily="34" charset="-120"/>
               </a:rPr>
               <a:t>2. ランサーズ「フリーランス実態調査2024」 — 広義フリーランス1,303万人、AI興味なし約5割</a:t>
             </a:r>
@@ -3548,9 +3548,9 @@
                 <a:solidFill>
                   <a:srgbClr val="1A1A2E"/>
                 </a:solidFill>
-                <a:latin typeface="Arial" pitchFamily="34" charset="0"/>
-                <a:ea typeface="Arial" pitchFamily="34" charset="-122"/>
-                <a:cs typeface="Arial" pitchFamily="34" charset="-120"/>
+                <a:latin typeface="Noto Sans JP" pitchFamily="34" charset="0"/>
+                <a:ea typeface="Noto Sans JP" pitchFamily="34" charset="-122"/>
+                <a:cs typeface="Noto Sans JP" pitchFamily="34" charset="-120"/>
               </a:rPr>
               <a:t>3. フリーランス協会「フリーランス白書2024」 — 事務負担25%回答、協働実態</a:t>
             </a:r>
@@ -3568,9 +3568,9 @@
                 <a:solidFill>
                   <a:srgbClr val="1A1A2E"/>
                 </a:solidFill>
-                <a:latin typeface="Arial" pitchFamily="34" charset="0"/>
-                <a:ea typeface="Arial" pitchFamily="34" charset="-122"/>
-                <a:cs typeface="Arial" pitchFamily="34" charset="-120"/>
+                <a:latin typeface="Noto Sans JP" pitchFamily="34" charset="0"/>
+                <a:ea typeface="Noto Sans JP" pitchFamily="34" charset="-122"/>
+                <a:cs typeface="Noto Sans JP" pitchFamily="34" charset="-120"/>
               </a:rPr>
               <a:t>4. フリーランス協会「フリーランス白書2025」 — 収入0円月32.4%、収入不満40.2%</a:t>
             </a:r>
@@ -3588,9 +3588,9 @@
                 <a:solidFill>
                   <a:srgbClr val="1A1A2E"/>
                 </a:solidFill>
-                <a:latin typeface="Arial" pitchFamily="34" charset="0"/>
-                <a:ea typeface="Arial" pitchFamily="34" charset="-122"/>
-                <a:cs typeface="Arial" pitchFamily="34" charset="-120"/>
+                <a:latin typeface="Noto Sans JP" pitchFamily="34" charset="0"/>
+                <a:ea typeface="Noto Sans JP" pitchFamily="34" charset="-122"/>
+                <a:cs typeface="Noto Sans JP" pitchFamily="34" charset="-120"/>
               </a:rPr>
               <a:t>5. フリマド「フリーランスのSaaS利用に関するアンケート調査」(2023, n=109) — SaaS利用率77%、月額支出分布</a:t>
             </a:r>
@@ -3608,9 +3608,9 @@
                 <a:solidFill>
                   <a:srgbClr val="1A1A2E"/>
                 </a:solidFill>
-                <a:latin typeface="Arial" pitchFamily="34" charset="0"/>
-                <a:ea typeface="Arial" pitchFamily="34" charset="-122"/>
-                <a:cs typeface="Arial" pitchFamily="34" charset="-120"/>
+                <a:latin typeface="Noto Sans JP" pitchFamily="34" charset="0"/>
+                <a:ea typeface="Noto Sans JP" pitchFamily="34" charset="-122"/>
+                <a:cs typeface="Noto Sans JP" pitchFamily="34" charset="-120"/>
               </a:rPr>
               <a:t>6. マネーフォワード — 個人事業主の雇用コスト（給与の約2倍）</a:t>
             </a:r>
@@ -3628,9 +3628,9 @@
                 <a:solidFill>
                   <a:srgbClr val="1A1A2E"/>
                 </a:solidFill>
-                <a:latin typeface="Arial" pitchFamily="34" charset="0"/>
-                <a:ea typeface="Arial" pitchFamily="34" charset="-122"/>
-                <a:cs typeface="Arial" pitchFamily="34" charset="-120"/>
+                <a:latin typeface="Noto Sans JP" pitchFamily="34" charset="0"/>
+                <a:ea typeface="Noto Sans JP" pitchFamily="34" charset="-122"/>
+                <a:cs typeface="Noto Sans JP" pitchFamily="34" charset="-120"/>
               </a:rPr>
               <a:t>7. IDC Japan「2024年 国内AIシステム市場予測」 — 2024年1.3兆円、2029年4.2兆円</a:t>
             </a:r>
@@ -3648,9 +3648,9 @@
                 <a:solidFill>
                   <a:srgbClr val="1A1A2E"/>
                 </a:solidFill>
-                <a:latin typeface="Arial" pitchFamily="34" charset="0"/>
-                <a:ea typeface="Arial" pitchFamily="34" charset="-122"/>
-                <a:cs typeface="Arial" pitchFamily="34" charset="-120"/>
+                <a:latin typeface="Noto Sans JP" pitchFamily="34" charset="0"/>
+                <a:ea typeface="Noto Sans JP" pitchFamily="34" charset="-122"/>
+                <a:cs typeface="Noto Sans JP" pitchFamily="34" charset="-120"/>
               </a:rPr>
               <a:t>8. 矢野経済研究所「対話型AIシステム市場調査」 — チャットボット市場CAGR 22.9%</a:t>
             </a:r>
@@ -3668,9 +3668,9 @@
                 <a:solidFill>
                   <a:srgbClr val="1A1A2E"/>
                 </a:solidFill>
-                <a:latin typeface="Arial" pitchFamily="34" charset="0"/>
-                <a:ea typeface="Arial" pitchFamily="34" charset="-122"/>
-                <a:cs typeface="Arial" pitchFamily="34" charset="-120"/>
+                <a:latin typeface="Noto Sans JP" pitchFamily="34" charset="0"/>
+                <a:ea typeface="Noto Sans JP" pitchFamily="34" charset="-122"/>
+                <a:cs typeface="Noto Sans JP" pitchFamily="34" charset="-120"/>
               </a:rPr>
               <a:t>9. LINEヤフー プレスリリース (2026年1月) — LINE MAU 1億人超、カバー率96%</a:t>
             </a:r>
@@ -3688,9 +3688,9 @@
                 <a:solidFill>
                   <a:srgbClr val="1A1A2E"/>
                 </a:solidFill>
-                <a:latin typeface="Arial" pitchFamily="34" charset="0"/>
-                <a:ea typeface="Arial" pitchFamily="34" charset="-122"/>
-                <a:cs typeface="Arial" pitchFamily="34" charset="-120"/>
+                <a:latin typeface="Noto Sans JP" pitchFamily="34" charset="0"/>
+                <a:ea typeface="Noto Sans JP" pitchFamily="34" charset="-122"/>
+                <a:cs typeface="Noto Sans JP" pitchFamily="34" charset="-120"/>
               </a:rPr>
               <a:t>10. モビルス「LINE公式アカウント利用実態調査2025」(n=655) — チャット問い合わせ希望6割超</a:t>
             </a:r>
@@ -3708,9 +3708,9 @@
                 <a:solidFill>
                   <a:srgbClr val="1A1A2E"/>
                 </a:solidFill>
-                <a:latin typeface="Arial" pitchFamily="34" charset="0"/>
-                <a:ea typeface="Arial" pitchFamily="34" charset="-122"/>
-                <a:cs typeface="Arial" pitchFamily="34" charset="-120"/>
+                <a:latin typeface="Noto Sans JP" pitchFamily="34" charset="0"/>
+                <a:ea typeface="Noto Sans JP" pitchFamily="34" charset="-122"/>
+                <a:cs typeface="Noto Sans JP" pitchFamily="34" charset="-120"/>
               </a:rPr>
               <a:t>11. BPOテクノロジー (2023) — 日本のオンラインアシスタント利用率3%（米国約70%）</a:t>
             </a:r>
@@ -3728,9 +3728,9 @@
                 <a:solidFill>
                   <a:srgbClr val="1A1A2E"/>
                 </a:solidFill>
-                <a:latin typeface="Arial" pitchFamily="34" charset="0"/>
-                <a:ea typeface="Arial" pitchFamily="34" charset="-122"/>
-                <a:cs typeface="Arial" pitchFamily="34" charset="-120"/>
+                <a:latin typeface="Noto Sans JP" pitchFamily="34" charset="0"/>
+                <a:ea typeface="Noto Sans JP" pitchFamily="34" charset="-122"/>
+                <a:cs typeface="Noto Sans JP" pitchFamily="34" charset="-120"/>
               </a:rPr>
               <a:t>12. HELP YOU「オンライン秘書サービス比較15選」(2025) — 人間VA料金相場</a:t>
             </a:r>
@@ -3748,9 +3748,9 @@
                 <a:solidFill>
                   <a:srgbClr val="1A1A2E"/>
                 </a:solidFill>
-                <a:latin typeface="Arial" pitchFamily="34" charset="0"/>
-                <a:ea typeface="Arial" pitchFamily="34" charset="-122"/>
-                <a:cs typeface="Arial" pitchFamily="34" charset="-120"/>
+                <a:latin typeface="Noto Sans JP" pitchFamily="34" charset="0"/>
+                <a:ea typeface="Noto Sans JP" pitchFamily="34" charset="-122"/>
+                <a:cs typeface="Noto Sans JP" pitchFamily="34" charset="-120"/>
               </a:rPr>
               <a:t>13. 野村総合研究所 (2025, n=6,156) — 中小企業AI導入率14.9%</a:t>
             </a:r>
@@ -3819,9 +3819,9 @@
                 <a:solidFill>
                   <a:srgbClr val="1E2761"/>
                 </a:solidFill>
-                <a:latin typeface="Arial" pitchFamily="34" charset="0"/>
-                <a:ea typeface="Arial" pitchFamily="34" charset="-122"/>
-                <a:cs typeface="Arial" pitchFamily="34" charset="-120"/>
+                <a:latin typeface="Noto Sans JP" pitchFamily="34" charset="0"/>
+                <a:ea typeface="Noto Sans JP" pitchFamily="34" charset="-122"/>
+                <a:cs typeface="Noto Sans JP" pitchFamily="34" charset="-120"/>
               </a:rPr>
               <a:t>背景：フリーランスの「時間がない」問題</a:t>
             </a:r>
@@ -3885,9 +3885,9 @@
                 <a:solidFill>
                   <a:srgbClr val="4A90D9"/>
                 </a:solidFill>
-                <a:latin typeface="Arial Black" pitchFamily="34" charset="0"/>
-                <a:ea typeface="Arial Black" pitchFamily="34" charset="-122"/>
-                <a:cs typeface="Arial Black" pitchFamily="34" charset="-120"/>
+                <a:latin typeface="Noto Sans JP" pitchFamily="34" charset="0"/>
+                <a:ea typeface="Noto Sans JP" pitchFamily="34" charset="-122"/>
+                <a:cs typeface="Noto Sans JP" pitchFamily="34" charset="-120"/>
               </a:rPr>
               <a:t>209万人</a:t>
             </a:r>
@@ -3924,9 +3924,9 @@
                 <a:solidFill>
                   <a:srgbClr val="8892A0"/>
                 </a:solidFill>
-                <a:latin typeface="Arial" pitchFamily="34" charset="0"/>
-                <a:ea typeface="Arial" pitchFamily="34" charset="-122"/>
-                <a:cs typeface="Arial" pitchFamily="34" charset="-120"/>
+                <a:latin typeface="Noto Sans JP" pitchFamily="34" charset="0"/>
+                <a:ea typeface="Noto Sans JP" pitchFamily="34" charset="-122"/>
+                <a:cs typeface="Noto Sans JP" pitchFamily="34" charset="-120"/>
               </a:rPr>
               <a:t>本業フリーランス</a:t>
             </a:r>
@@ -3963,9 +3963,9 @@
                 <a:solidFill>
                   <a:srgbClr val="A0A8B4"/>
                 </a:solidFill>
-                <a:latin typeface="Arial" pitchFamily="34" charset="0"/>
-                <a:ea typeface="Arial" pitchFamily="34" charset="-122"/>
-                <a:cs typeface="Arial" pitchFamily="34" charset="-120"/>
+                <a:latin typeface="Noto Sans JP" pitchFamily="34" charset="0"/>
+                <a:ea typeface="Noto Sans JP" pitchFamily="34" charset="-122"/>
+                <a:cs typeface="Noto Sans JP" pitchFamily="34" charset="-120"/>
               </a:rPr>
               <a:t>総務省「就業構造基本調査」</a:t>
             </a:r>
@@ -3980,9 +3980,9 @@
                 <a:solidFill>
                   <a:srgbClr val="A0A8B4"/>
                 </a:solidFill>
-                <a:latin typeface="Arial" pitchFamily="34" charset="0"/>
-                <a:ea typeface="Arial" pitchFamily="34" charset="-122"/>
-                <a:cs typeface="Arial" pitchFamily="34" charset="-120"/>
+                <a:latin typeface="Noto Sans JP" pitchFamily="34" charset="0"/>
+                <a:ea typeface="Noto Sans JP" pitchFamily="34" charset="-122"/>
+                <a:cs typeface="Noto Sans JP" pitchFamily="34" charset="-120"/>
               </a:rPr>
               <a:t>(2022年)。広義では</a:t>
             </a:r>
@@ -3997,9 +3997,9 @@
                 <a:solidFill>
                   <a:srgbClr val="A0A8B4"/>
                 </a:solidFill>
-                <a:latin typeface="Arial" pitchFamily="34" charset="0"/>
-                <a:ea typeface="Arial" pitchFamily="34" charset="-122"/>
-                <a:cs typeface="Arial" pitchFamily="34" charset="-120"/>
+                <a:latin typeface="Noto Sans JP" pitchFamily="34" charset="0"/>
+                <a:ea typeface="Noto Sans JP" pitchFamily="34" charset="-122"/>
+                <a:cs typeface="Noto Sans JP" pitchFamily="34" charset="-120"/>
               </a:rPr>
               <a:t>1,303万人（ランサーズ2024）</a:t>
             </a:r>
@@ -4063,9 +4063,9 @@
                 <a:solidFill>
                   <a:srgbClr val="F39C12"/>
                 </a:solidFill>
-                <a:latin typeface="Arial Black" pitchFamily="34" charset="0"/>
-                <a:ea typeface="Arial Black" pitchFamily="34" charset="-122"/>
-                <a:cs typeface="Arial Black" pitchFamily="34" charset="-120"/>
+                <a:latin typeface="Noto Sans JP" pitchFamily="34" charset="0"/>
+                <a:ea typeface="Noto Sans JP" pitchFamily="34" charset="-122"/>
+                <a:cs typeface="Noto Sans JP" pitchFamily="34" charset="-120"/>
               </a:rPr>
               <a:t>25%</a:t>
             </a:r>
@@ -4102,9 +4102,9 @@
                 <a:solidFill>
                   <a:srgbClr val="8892A0"/>
                 </a:solidFill>
-                <a:latin typeface="Arial" pitchFamily="34" charset="0"/>
-                <a:ea typeface="Arial" pitchFamily="34" charset="-122"/>
-                <a:cs typeface="Arial" pitchFamily="34" charset="-120"/>
+                <a:latin typeface="Noto Sans JP" pitchFamily="34" charset="0"/>
+                <a:ea typeface="Noto Sans JP" pitchFamily="34" charset="-122"/>
+                <a:cs typeface="Noto Sans JP" pitchFamily="34" charset="-120"/>
               </a:rPr>
               <a:t>事務作業を負担と回答</a:t>
             </a:r>
@@ -4141,9 +4141,9 @@
                 <a:solidFill>
                   <a:srgbClr val="A0A8B4"/>
                 </a:solidFill>
-                <a:latin typeface="Arial" pitchFamily="34" charset="0"/>
-                <a:ea typeface="Arial" pitchFamily="34" charset="-122"/>
-                <a:cs typeface="Arial" pitchFamily="34" charset="-120"/>
+                <a:latin typeface="Noto Sans JP" pitchFamily="34" charset="0"/>
+                <a:ea typeface="Noto Sans JP" pitchFamily="34" charset="-122"/>
+                <a:cs typeface="Noto Sans JP" pitchFamily="34" charset="-120"/>
               </a:rPr>
               <a:t>フリーランス白書2024</a:t>
             </a:r>
@@ -4158,9 +4158,9 @@
                 <a:solidFill>
                   <a:srgbClr val="A0A8B4"/>
                 </a:solidFill>
-                <a:latin typeface="Arial" pitchFamily="34" charset="0"/>
-                <a:ea typeface="Arial" pitchFamily="34" charset="-122"/>
-                <a:cs typeface="Arial" pitchFamily="34" charset="-120"/>
+                <a:latin typeface="Noto Sans JP" pitchFamily="34" charset="0"/>
+                <a:ea typeface="Noto Sans JP" pitchFamily="34" charset="-122"/>
+                <a:cs typeface="Noto Sans JP" pitchFamily="34" charset="-120"/>
               </a:rPr>
               <a:t>（フリーランス協会）</a:t>
             </a:r>
@@ -4175,9 +4175,9 @@
                 <a:solidFill>
                   <a:srgbClr val="A0A8B4"/>
                 </a:solidFill>
-                <a:latin typeface="Arial" pitchFamily="34" charset="0"/>
-                <a:ea typeface="Arial" pitchFamily="34" charset="-122"/>
-                <a:cs typeface="Arial" pitchFamily="34" charset="-120"/>
+                <a:latin typeface="Noto Sans JP" pitchFamily="34" charset="0"/>
+                <a:ea typeface="Noto Sans JP" pitchFamily="34" charset="-122"/>
+                <a:cs typeface="Noto Sans JP" pitchFamily="34" charset="-120"/>
               </a:rPr>
               <a:t>稼働時間の約20%が</a:t>
             </a:r>
@@ -4192,9 +4192,9 @@
                 <a:solidFill>
                   <a:srgbClr val="A0A8B4"/>
                 </a:solidFill>
-                <a:latin typeface="Arial" pitchFamily="34" charset="0"/>
-                <a:ea typeface="Arial" pitchFamily="34" charset="-122"/>
-                <a:cs typeface="Arial" pitchFamily="34" charset="-120"/>
+                <a:latin typeface="Noto Sans JP" pitchFamily="34" charset="0"/>
+                <a:ea typeface="Noto Sans JP" pitchFamily="34" charset="-122"/>
+                <a:cs typeface="Noto Sans JP" pitchFamily="34" charset="-120"/>
               </a:rPr>
               <a:t>バックオフィス業務</a:t>
             </a:r>
@@ -4258,9 +4258,9 @@
                 <a:solidFill>
                   <a:srgbClr val="E74C3C"/>
                 </a:solidFill>
-                <a:latin typeface="Arial Black" pitchFamily="34" charset="0"/>
-                <a:ea typeface="Arial Black" pitchFamily="34" charset="-122"/>
-                <a:cs typeface="Arial Black" pitchFamily="34" charset="-120"/>
+                <a:latin typeface="Noto Sans JP" pitchFamily="34" charset="0"/>
+                <a:ea typeface="Noto Sans JP" pitchFamily="34" charset="-122"/>
+                <a:cs typeface="Noto Sans JP" pitchFamily="34" charset="-120"/>
               </a:rPr>
               <a:t>約2倍</a:t>
             </a:r>
@@ -4297,9 +4297,9 @@
                 <a:solidFill>
                   <a:srgbClr val="8892A0"/>
                 </a:solidFill>
-                <a:latin typeface="Arial" pitchFamily="34" charset="0"/>
-                <a:ea typeface="Arial" pitchFamily="34" charset="-122"/>
-                <a:cs typeface="Arial" pitchFamily="34" charset="-120"/>
+                <a:latin typeface="Noto Sans JP" pitchFamily="34" charset="0"/>
+                <a:ea typeface="Noto Sans JP" pitchFamily="34" charset="-122"/>
+                <a:cs typeface="Noto Sans JP" pitchFamily="34" charset="-120"/>
               </a:rPr>
               <a:t>雇用コスト vs 給与</a:t>
             </a:r>
@@ -4336,9 +4336,9 @@
                 <a:solidFill>
                   <a:srgbClr val="A0A8B4"/>
                 </a:solidFill>
-                <a:latin typeface="Arial" pitchFamily="34" charset="0"/>
-                <a:ea typeface="Arial" pitchFamily="34" charset="-122"/>
-                <a:cs typeface="Arial" pitchFamily="34" charset="-120"/>
+                <a:latin typeface="Noto Sans JP" pitchFamily="34" charset="0"/>
+                <a:ea typeface="Noto Sans JP" pitchFamily="34" charset="-122"/>
+                <a:cs typeface="Noto Sans JP" pitchFamily="34" charset="-120"/>
               </a:rPr>
               <a:t>社保・労災・採用・教育費で</a:t>
             </a:r>
@@ -4353,9 +4353,9 @@
                 <a:solidFill>
                   <a:srgbClr val="A0A8B4"/>
                 </a:solidFill>
-                <a:latin typeface="Arial" pitchFamily="34" charset="0"/>
-                <a:ea typeface="Arial" pitchFamily="34" charset="-122"/>
-                <a:cs typeface="Arial" pitchFamily="34" charset="-120"/>
+                <a:latin typeface="Noto Sans JP" pitchFamily="34" charset="0"/>
+                <a:ea typeface="Noto Sans JP" pitchFamily="34" charset="-122"/>
+                <a:cs typeface="Noto Sans JP" pitchFamily="34" charset="-120"/>
               </a:rPr>
               <a:t>給与の約2倍のコスト</a:t>
             </a:r>
@@ -4370,9 +4370,9 @@
                 <a:solidFill>
                   <a:srgbClr val="A0A8B4"/>
                 </a:solidFill>
-                <a:latin typeface="Arial" pitchFamily="34" charset="0"/>
-                <a:ea typeface="Arial" pitchFamily="34" charset="-122"/>
-                <a:cs typeface="Arial" pitchFamily="34" charset="-120"/>
+                <a:latin typeface="Noto Sans JP" pitchFamily="34" charset="0"/>
+                <a:ea typeface="Noto Sans JP" pitchFamily="34" charset="-122"/>
+                <a:cs typeface="Noto Sans JP" pitchFamily="34" charset="-120"/>
               </a:rPr>
               <a:t>（マネーフォワード調べ）</a:t>
             </a:r>
@@ -4387,9 +4387,9 @@
                 <a:solidFill>
                   <a:srgbClr val="A0A8B4"/>
                 </a:solidFill>
-                <a:latin typeface="Arial" pitchFamily="34" charset="0"/>
-                <a:ea typeface="Arial" pitchFamily="34" charset="-122"/>
-                <a:cs typeface="Arial" pitchFamily="34" charset="-120"/>
+                <a:latin typeface="Noto Sans JP" pitchFamily="34" charset="0"/>
+                <a:ea typeface="Noto Sans JP" pitchFamily="34" charset="-122"/>
+                <a:cs typeface="Noto Sans JP" pitchFamily="34" charset="-120"/>
               </a:rPr>
               <a:t>→ 個人事業主には非現実的</a:t>
             </a:r>
@@ -4453,9 +4453,9 @@
                 <a:solidFill>
                   <a:srgbClr val="1E2761"/>
                 </a:solidFill>
-                <a:latin typeface="Arial" pitchFamily="34" charset="0"/>
-                <a:ea typeface="Arial" pitchFamily="34" charset="-122"/>
-                <a:cs typeface="Arial" pitchFamily="34" charset="-120"/>
+                <a:latin typeface="Noto Sans JP" pitchFamily="34" charset="0"/>
+                <a:ea typeface="Noto Sans JP" pitchFamily="34" charset="-122"/>
+                <a:cs typeface="Noto Sans JP" pitchFamily="34" charset="-120"/>
               </a:rPr>
               <a:t>収入0円の月がある: 32.4%</a:t>
             </a:r>
@@ -4467,9 +4467,9 @@
                 <a:solidFill>
                   <a:srgbClr val="E74C3C"/>
                 </a:solidFill>
-                <a:latin typeface="Arial" pitchFamily="34" charset="0"/>
-                <a:ea typeface="Arial" pitchFamily="34" charset="-122"/>
-                <a:cs typeface="Arial" pitchFamily="34" charset="-120"/>
+                <a:latin typeface="Noto Sans JP" pitchFamily="34" charset="0"/>
+                <a:ea typeface="Noto Sans JP" pitchFamily="34" charset="-122"/>
+                <a:cs typeface="Noto Sans JP" pitchFamily="34" charset="-120"/>
               </a:rPr>
               <a:t>　|　収入に不満: 40.2%</a:t>
             </a:r>
@@ -4481,9 +4481,9 @@
                 <a:solidFill>
                   <a:srgbClr val="A0A8B4"/>
                 </a:solidFill>
-                <a:latin typeface="Arial" pitchFamily="34" charset="0"/>
-                <a:ea typeface="Arial" pitchFamily="34" charset="-122"/>
-                <a:cs typeface="Arial" pitchFamily="34" charset="-120"/>
+                <a:latin typeface="Noto Sans JP" pitchFamily="34" charset="0"/>
+                <a:ea typeface="Noto Sans JP" pitchFamily="34" charset="-122"/>
+                <a:cs typeface="Noto Sans JP" pitchFamily="34" charset="-120"/>
               </a:rPr>
               <a:t>　— フリーランス白書2025（フリーランス協会）</a:t>
             </a:r>
@@ -4552,9 +4552,9 @@
                 <a:solidFill>
                   <a:srgbClr val="1E2761"/>
                 </a:solidFill>
-                <a:latin typeface="Arial" pitchFamily="34" charset="0"/>
-                <a:ea typeface="Arial" pitchFamily="34" charset="-122"/>
-                <a:cs typeface="Arial" pitchFamily="34" charset="-120"/>
+                <a:latin typeface="Noto Sans JP" pitchFamily="34" charset="0"/>
+                <a:ea typeface="Noto Sans JP" pitchFamily="34" charset="-122"/>
+                <a:cs typeface="Noto Sans JP" pitchFamily="34" charset="-120"/>
               </a:rPr>
               <a:t>市場分析</a:t>
             </a:r>
@@ -4754,9 +4754,9 @@
                 <a:solidFill>
                   <a:srgbClr val="1E2761"/>
                 </a:solidFill>
-                <a:latin typeface="Arial" pitchFamily="34" charset="0"/>
-                <a:ea typeface="Arial" pitchFamily="34" charset="-122"/>
-                <a:cs typeface="Arial" pitchFamily="34" charset="-120"/>
+                <a:latin typeface="Noto Sans JP" pitchFamily="34" charset="0"/>
+                <a:ea typeface="Noto Sans JP" pitchFamily="34" charset="-122"/>
+                <a:cs typeface="Noto Sans JP" pitchFamily="34" charset="-120"/>
               </a:rPr>
               <a:t>TAM: 約250億円/年</a:t>
             </a:r>
@@ -4774,9 +4774,9 @@
                 <a:solidFill>
                   <a:srgbClr val="8892A0"/>
                 </a:solidFill>
-                <a:latin typeface="Arial" pitchFamily="34" charset="0"/>
-                <a:ea typeface="Arial" pitchFamily="34" charset="-122"/>
-                <a:cs typeface="Arial" pitchFamily="34" charset="-120"/>
+                <a:latin typeface="Noto Sans JP" pitchFamily="34" charset="0"/>
+                <a:ea typeface="Noto Sans JP" pitchFamily="34" charset="-122"/>
+                <a:cs typeface="Noto Sans JP" pitchFamily="34" charset="-120"/>
               </a:rPr>
               <a:t>本業フリーランス209万人 × 年間約1.2万円（月1,000円のSaaS支出中央値）</a:t>
             </a:r>
@@ -4797,9 +4797,9 @@
                 <a:solidFill>
                   <a:srgbClr val="A0A8B4"/>
                 </a:solidFill>
-                <a:latin typeface="Arial" pitchFamily="34" charset="0"/>
-                <a:ea typeface="Arial" pitchFamily="34" charset="-122"/>
-                <a:cs typeface="Arial" pitchFamily="34" charset="-120"/>
+                <a:latin typeface="Noto Sans JP" pitchFamily="34" charset="0"/>
+                <a:ea typeface="Noto Sans JP" pitchFamily="34" charset="-122"/>
+                <a:cs typeface="Noto Sans JP" pitchFamily="34" charset="-120"/>
               </a:rPr>
               <a:t>出典: 総務省 就業構造基本調査2022 / フリマド SaaS利用調査2023</a:t>
             </a:r>
@@ -4863,9 +4863,9 @@
                 <a:solidFill>
                   <a:srgbClr val="4A90D9"/>
                 </a:solidFill>
-                <a:latin typeface="Arial" pitchFamily="34" charset="0"/>
-                <a:ea typeface="Arial" pitchFamily="34" charset="-122"/>
-                <a:cs typeface="Arial" pitchFamily="34" charset="-120"/>
+                <a:latin typeface="Noto Sans JP" pitchFamily="34" charset="0"/>
+                <a:ea typeface="Noto Sans JP" pitchFamily="34" charset="-122"/>
+                <a:cs typeface="Noto Sans JP" pitchFamily="34" charset="-120"/>
               </a:rPr>
               <a:t>SAM: 約30億円/年</a:t>
             </a:r>
@@ -4883,9 +4883,9 @@
                 <a:solidFill>
                   <a:srgbClr val="8892A0"/>
                 </a:solidFill>
-                <a:latin typeface="Arial" pitchFamily="34" charset="0"/>
-                <a:ea typeface="Arial" pitchFamily="34" charset="-122"/>
-                <a:cs typeface="Arial" pitchFamily="34" charset="-120"/>
+                <a:latin typeface="Noto Sans JP" pitchFamily="34" charset="0"/>
+                <a:ea typeface="Noto Sans JP" pitchFamily="34" charset="-122"/>
+                <a:cs typeface="Noto Sans JP" pitchFamily="34" charset="-120"/>
               </a:rPr>
               <a:t>SaaS利用率77% × 有料契約45% × 月額1万円以上支払い意向20% → 約14万人</a:t>
             </a:r>
@@ -4906,9 +4906,9 @@
                 <a:solidFill>
                   <a:srgbClr val="A0A8B4"/>
                 </a:solidFill>
-                <a:latin typeface="Arial" pitchFamily="34" charset="0"/>
-                <a:ea typeface="Arial" pitchFamily="34" charset="-122"/>
-                <a:cs typeface="Arial" pitchFamily="34" charset="-120"/>
+                <a:latin typeface="Noto Sans JP" pitchFamily="34" charset="0"/>
+                <a:ea typeface="Noto Sans JP" pitchFamily="34" charset="-122"/>
+                <a:cs typeface="Noto Sans JP" pitchFamily="34" charset="-120"/>
               </a:rPr>
               <a:t>出典: フリマド「フリーランスのSaaS利用に関するアンケート調査」2023</a:t>
             </a:r>
@@ -4972,9 +4972,9 @@
                 <a:solidFill>
                   <a:srgbClr val="1E2761"/>
                 </a:solidFill>
-                <a:latin typeface="Arial" pitchFamily="34" charset="0"/>
-                <a:ea typeface="Arial" pitchFamily="34" charset="-122"/>
-                <a:cs typeface="Arial" pitchFamily="34" charset="-120"/>
+                <a:latin typeface="Noto Sans JP" pitchFamily="34" charset="0"/>
+                <a:ea typeface="Noto Sans JP" pitchFamily="34" charset="-122"/>
+                <a:cs typeface="Noto Sans JP" pitchFamily="34" charset="-120"/>
               </a:rPr>
               <a:t>SOM: 約7,200万円/年（初年度）</a:t>
             </a:r>
@@ -4992,9 +4992,9 @@
                 <a:solidFill>
                   <a:srgbClr val="8892A0"/>
                 </a:solidFill>
-                <a:latin typeface="Arial" pitchFamily="34" charset="0"/>
-                <a:ea typeface="Arial" pitchFamily="34" charset="-122"/>
-                <a:cs typeface="Arial" pitchFamily="34" charset="-120"/>
+                <a:latin typeface="Noto Sans JP" pitchFamily="34" charset="0"/>
+                <a:ea typeface="Noto Sans JP" pitchFamily="34" charset="-122"/>
+                <a:cs typeface="Noto Sans JP" pitchFamily="34" charset="-120"/>
               </a:rPr>
               <a:t>初年度獲得目標500人 × 平均月額12,000円 × 12ヶ月</a:t>
             </a:r>
@@ -5015,9 +5015,9 @@
                 <a:solidFill>
                   <a:srgbClr val="A0A8B4"/>
                 </a:solidFill>
-                <a:latin typeface="Arial" pitchFamily="34" charset="0"/>
-                <a:ea typeface="Arial" pitchFamily="34" charset="-122"/>
-                <a:cs typeface="Arial" pitchFamily="34" charset="-120"/>
+                <a:latin typeface="Noto Sans JP" pitchFamily="34" charset="0"/>
+                <a:ea typeface="Noto Sans JP" pitchFamily="34" charset="-122"/>
+                <a:cs typeface="Noto Sans JP" pitchFamily="34" charset="-120"/>
               </a:rPr>
               <a:t>※ 500人 = SAM 14万人の0.36%。β版テスト+口コミベースの保守的推計</a:t>
             </a:r>
@@ -5086,9 +5086,9 @@
                 <a:solidFill>
                   <a:srgbClr val="FFFFFF"/>
                 </a:solidFill>
-                <a:latin typeface="Arial" pitchFamily="34" charset="0"/>
-                <a:ea typeface="Arial" pitchFamily="34" charset="-122"/>
-                <a:cs typeface="Arial" pitchFamily="34" charset="-120"/>
+                <a:latin typeface="Noto Sans JP" pitchFamily="34" charset="0"/>
+                <a:ea typeface="Noto Sans JP" pitchFamily="34" charset="-122"/>
+                <a:cs typeface="Noto Sans JP" pitchFamily="34" charset="-120"/>
               </a:rPr>
               <a:t>追い風となる市場トレンド</a:t>
             </a:r>
@@ -5152,9 +5152,9 @@
                 <a:solidFill>
                   <a:srgbClr val="4A90D9"/>
                 </a:solidFill>
-                <a:latin typeface="Arial" pitchFamily="34" charset="0"/>
-                <a:ea typeface="Arial" pitchFamily="34" charset="-122"/>
-                <a:cs typeface="Arial" pitchFamily="34" charset="-120"/>
+                <a:latin typeface="Noto Sans JP" pitchFamily="34" charset="0"/>
+                <a:ea typeface="Noto Sans JP" pitchFamily="34" charset="-122"/>
+                <a:cs typeface="Noto Sans JP" pitchFamily="34" charset="-120"/>
               </a:rPr>
               <a:t>国内AI市場 CAGR 25.6%</a:t>
             </a:r>
@@ -5169,9 +5169,9 @@
                 <a:solidFill>
                   <a:srgbClr val="CADCFC"/>
                 </a:solidFill>
-                <a:latin typeface="Arial" pitchFamily="34" charset="0"/>
-                <a:ea typeface="Arial" pitchFamily="34" charset="-122"/>
-                <a:cs typeface="Arial" pitchFamily="34" charset="-120"/>
+                <a:latin typeface="Noto Sans JP" pitchFamily="34" charset="0"/>
+                <a:ea typeface="Noto Sans JP" pitchFamily="34" charset="-122"/>
+                <a:cs typeface="Noto Sans JP" pitchFamily="34" charset="-120"/>
               </a:rPr>
               <a:t>2024年 1.3兆円 → 2029年 4.2兆円（予測）</a:t>
             </a:r>
@@ -5186,9 +5186,9 @@
                 <a:solidFill>
                   <a:srgbClr val="A0A8B4"/>
                 </a:solidFill>
-                <a:latin typeface="Arial" pitchFamily="34" charset="0"/>
-                <a:ea typeface="Arial" pitchFamily="34" charset="-122"/>
-                <a:cs typeface="Arial" pitchFamily="34" charset="-120"/>
+                <a:latin typeface="Noto Sans JP" pitchFamily="34" charset="0"/>
+                <a:ea typeface="Noto Sans JP" pitchFamily="34" charset="-122"/>
+                <a:cs typeface="Noto Sans JP" pitchFamily="34" charset="-120"/>
               </a:rPr>
               <a:t>出典: IDC Japan 2024年国内AIシステム市場予測</a:t>
             </a:r>
@@ -5252,9 +5252,9 @@
                 <a:solidFill>
                   <a:srgbClr val="4A90D9"/>
                 </a:solidFill>
-                <a:latin typeface="Arial" pitchFamily="34" charset="0"/>
-                <a:ea typeface="Arial" pitchFamily="34" charset="-122"/>
-                <a:cs typeface="Arial" pitchFamily="34" charset="-120"/>
+                <a:latin typeface="Noto Sans JP" pitchFamily="34" charset="0"/>
+                <a:ea typeface="Noto Sans JP" pitchFamily="34" charset="-122"/>
+                <a:cs typeface="Noto Sans JP" pitchFamily="34" charset="-120"/>
               </a:rPr>
               <a:t>LINE MAU 1億人超</a:t>
             </a:r>
@@ -5269,9 +5269,9 @@
                 <a:solidFill>
                   <a:srgbClr val="CADCFC"/>
                 </a:solidFill>
-                <a:latin typeface="Arial" pitchFamily="34" charset="0"/>
-                <a:ea typeface="Arial" pitchFamily="34" charset="-122"/>
-                <a:cs typeface="Arial" pitchFamily="34" charset="-120"/>
+                <a:latin typeface="Noto Sans JP" pitchFamily="34" charset="0"/>
+                <a:ea typeface="Noto Sans JP" pitchFamily="34" charset="-122"/>
+                <a:cs typeface="Noto Sans JP" pitchFamily="34" charset="-120"/>
               </a:rPr>
               <a:t>人口カバー率96%。60代以上も約70%が利用</a:t>
             </a:r>
@@ -5286,9 +5286,9 @@
                 <a:solidFill>
                   <a:srgbClr val="A0A8B4"/>
                 </a:solidFill>
-                <a:latin typeface="Arial" pitchFamily="34" charset="0"/>
-                <a:ea typeface="Arial" pitchFamily="34" charset="-122"/>
-                <a:cs typeface="Arial" pitchFamily="34" charset="-120"/>
+                <a:latin typeface="Noto Sans JP" pitchFamily="34" charset="0"/>
+                <a:ea typeface="Noto Sans JP" pitchFamily="34" charset="-122"/>
+                <a:cs typeface="Noto Sans JP" pitchFamily="34" charset="-120"/>
               </a:rPr>
               <a:t>出典: LINEヤフー プレスリリース 2026年1月</a:t>
             </a:r>
@@ -5352,9 +5352,9 @@
                 <a:solidFill>
                   <a:srgbClr val="F39C12"/>
                 </a:solidFill>
-                <a:latin typeface="Arial" pitchFamily="34" charset="0"/>
-                <a:ea typeface="Arial" pitchFamily="34" charset="-122"/>
-                <a:cs typeface="Arial" pitchFamily="34" charset="-120"/>
+                <a:latin typeface="Noto Sans JP" pitchFamily="34" charset="0"/>
+                <a:ea typeface="Noto Sans JP" pitchFamily="34" charset="-122"/>
+                <a:cs typeface="Noto Sans JP" pitchFamily="34" charset="-120"/>
               </a:rPr>
               <a:t>オンラインアシスタント利用率 わずか3%</a:t>
             </a:r>
@@ -5369,9 +5369,9 @@
                 <a:solidFill>
                   <a:srgbClr val="CADCFC"/>
                 </a:solidFill>
-                <a:latin typeface="Arial" pitchFamily="34" charset="0"/>
-                <a:ea typeface="Arial" pitchFamily="34" charset="-122"/>
-                <a:cs typeface="Arial" pitchFamily="34" charset="-120"/>
+                <a:latin typeface="Noto Sans JP" pitchFamily="34" charset="0"/>
+                <a:ea typeface="Noto Sans JP" pitchFamily="34" charset="-122"/>
+                <a:cs typeface="Noto Sans JP" pitchFamily="34" charset="-120"/>
               </a:rPr>
               <a:t>米国は約70%。巨大な成長余地が存在</a:t>
             </a:r>
@@ -5386,9 +5386,9 @@
                 <a:solidFill>
                   <a:srgbClr val="A0A8B4"/>
                 </a:solidFill>
-                <a:latin typeface="Arial" pitchFamily="34" charset="0"/>
-                <a:ea typeface="Arial" pitchFamily="34" charset="-122"/>
-                <a:cs typeface="Arial" pitchFamily="34" charset="-120"/>
+                <a:latin typeface="Noto Sans JP" pitchFamily="34" charset="0"/>
+                <a:ea typeface="Noto Sans JP" pitchFamily="34" charset="-122"/>
+                <a:cs typeface="Noto Sans JP" pitchFamily="34" charset="-120"/>
               </a:rPr>
               <a:t>出典: BPOテクノロジー（PR TIMES）2023年</a:t>
             </a:r>
@@ -5452,9 +5452,9 @@
                 <a:solidFill>
                   <a:srgbClr val="F39C12"/>
                 </a:solidFill>
-                <a:latin typeface="Arial" pitchFamily="34" charset="0"/>
-                <a:ea typeface="Arial" pitchFamily="34" charset="-122"/>
-                <a:cs typeface="Arial" pitchFamily="34" charset="-120"/>
+                <a:latin typeface="Noto Sans JP" pitchFamily="34" charset="0"/>
+                <a:ea typeface="Noto Sans JP" pitchFamily="34" charset="-122"/>
+                <a:cs typeface="Noto Sans JP" pitchFamily="34" charset="-120"/>
               </a:rPr>
               <a:t>チャットボット市場 CAGR 22.9%</a:t>
             </a:r>
@@ -5469,9 +5469,9 @@
                 <a:solidFill>
                   <a:srgbClr val="CADCFC"/>
                 </a:solidFill>
-                <a:latin typeface="Arial" pitchFamily="34" charset="0"/>
-                <a:ea typeface="Arial" pitchFamily="34" charset="-122"/>
-                <a:cs typeface="Arial" pitchFamily="34" charset="-120"/>
+                <a:latin typeface="Noto Sans JP" pitchFamily="34" charset="0"/>
+                <a:ea typeface="Noto Sans JP" pitchFamily="34" charset="-122"/>
+                <a:cs typeface="Noto Sans JP" pitchFamily="34" charset="-120"/>
               </a:rPr>
               <a:t>2023年 112億円 → 2029年 445億円（予測）</a:t>
             </a:r>
@@ -5486,9 +5486,9 @@
                 <a:solidFill>
                   <a:srgbClr val="A0A8B4"/>
                 </a:solidFill>
-                <a:latin typeface="Arial" pitchFamily="34" charset="0"/>
-                <a:ea typeface="Arial" pitchFamily="34" charset="-122"/>
-                <a:cs typeface="Arial" pitchFamily="34" charset="-120"/>
+                <a:latin typeface="Noto Sans JP" pitchFamily="34" charset="0"/>
+                <a:ea typeface="Noto Sans JP" pitchFamily="34" charset="-122"/>
+                <a:cs typeface="Noto Sans JP" pitchFamily="34" charset="-120"/>
               </a:rPr>
               <a:t>出典: 矢野経済研究所「対話型AIシステム市場調査」</a:t>
             </a:r>
@@ -5525,9 +5525,9 @@
                 <a:solidFill>
                   <a:srgbClr val="A0A8B4"/>
                 </a:solidFill>
-                <a:latin typeface="Arial" pitchFamily="34" charset="0"/>
-                <a:ea typeface="Arial" pitchFamily="34" charset="-122"/>
-                <a:cs typeface="Arial" pitchFamily="34" charset="-120"/>
+                <a:latin typeface="Noto Sans JP" pitchFamily="34" charset="0"/>
+                <a:ea typeface="Noto Sans JP" pitchFamily="34" charset="-122"/>
+                <a:cs typeface="Noto Sans JP" pitchFamily="34" charset="-120"/>
               </a:rPr>
               <a:t>企業とのチャット問い合わせ希望: 全年代6割超、20-30代は7割 — モビルス「LINE公式アカウント利用実態調査2025」</a:t>
             </a:r>
@@ -5596,9 +5596,9 @@
                 <a:solidFill>
                   <a:srgbClr val="FFFFFF"/>
                 </a:solidFill>
-                <a:latin typeface="Arial" pitchFamily="34" charset="0"/>
-                <a:ea typeface="Arial" pitchFamily="34" charset="-122"/>
-                <a:cs typeface="Arial" pitchFamily="34" charset="-120"/>
+                <a:latin typeface="Noto Sans JP" pitchFamily="34" charset="0"/>
+                <a:ea typeface="Noto Sans JP" pitchFamily="34" charset="-122"/>
+                <a:cs typeface="Noto Sans JP" pitchFamily="34" charset="-120"/>
               </a:rPr>
               <a:t>ソリューション: LINE × AI で業務を丸投げ</a:t>
             </a:r>
@@ -5635,9 +5635,9 @@
                 <a:solidFill>
                   <a:srgbClr val="CADCFC"/>
                 </a:solidFill>
-                <a:latin typeface="Arial" pitchFamily="34" charset="0"/>
-                <a:ea typeface="Arial" pitchFamily="34" charset="-122"/>
-                <a:cs typeface="Arial" pitchFamily="34" charset="-120"/>
+                <a:latin typeface="Noto Sans JP" pitchFamily="34" charset="0"/>
+                <a:ea typeface="Noto Sans JP" pitchFamily="34" charset="-122"/>
+                <a:cs typeface="Noto Sans JP" pitchFamily="34" charset="-120"/>
               </a:rPr>
               <a:t>LINEに話しかけるだけで、AIが秘書・SNS担当・経理アシスタントを兼任</a:t>
             </a:r>
@@ -5701,9 +5701,9 @@
                 <a:solidFill>
                   <a:srgbClr val="FFFFFF"/>
                 </a:solidFill>
-                <a:latin typeface="Arial" pitchFamily="34" charset="0"/>
-                <a:ea typeface="Arial" pitchFamily="34" charset="-122"/>
-                <a:cs typeface="Arial" pitchFamily="34" charset="-120"/>
+                <a:latin typeface="Noto Sans JP" pitchFamily="34" charset="0"/>
+                <a:ea typeface="Noto Sans JP" pitchFamily="34" charset="-122"/>
+                <a:cs typeface="Noto Sans JP" pitchFamily="34" charset="-120"/>
               </a:rPr>
               <a:t>LINE</a:t>
             </a:r>
@@ -5718,9 +5718,9 @@
                 <a:solidFill>
                   <a:srgbClr val="FFFFFF"/>
                 </a:solidFill>
-                <a:latin typeface="Arial" pitchFamily="34" charset="0"/>
-                <a:ea typeface="Arial" pitchFamily="34" charset="-122"/>
-                <a:cs typeface="Arial" pitchFamily="34" charset="-120"/>
+                <a:latin typeface="Noto Sans JP" pitchFamily="34" charset="0"/>
+                <a:ea typeface="Noto Sans JP" pitchFamily="34" charset="-122"/>
+                <a:cs typeface="Noto Sans JP" pitchFamily="34" charset="-120"/>
               </a:rPr>
               <a:t>メッセージ</a:t>
             </a:r>
@@ -5807,9 +5807,9 @@
                 <a:solidFill>
                   <a:srgbClr val="FFFFFF"/>
                 </a:solidFill>
-                <a:latin typeface="Arial" pitchFamily="34" charset="0"/>
-                <a:ea typeface="Arial" pitchFamily="34" charset="-122"/>
-                <a:cs typeface="Arial" pitchFamily="34" charset="-120"/>
+                <a:latin typeface="Noto Sans JP" pitchFamily="34" charset="0"/>
+                <a:ea typeface="Noto Sans JP" pitchFamily="34" charset="-122"/>
+                <a:cs typeface="Noto Sans JP" pitchFamily="34" charset="-120"/>
               </a:rPr>
               <a:t>AI秘書が</a:t>
             </a:r>
@@ -5824,9 +5824,9 @@
                 <a:solidFill>
                   <a:srgbClr val="FFFFFF"/>
                 </a:solidFill>
-                <a:latin typeface="Arial" pitchFamily="34" charset="0"/>
-                <a:ea typeface="Arial" pitchFamily="34" charset="-122"/>
-                <a:cs typeface="Arial" pitchFamily="34" charset="-120"/>
+                <a:latin typeface="Noto Sans JP" pitchFamily="34" charset="0"/>
+                <a:ea typeface="Noto Sans JP" pitchFamily="34" charset="-122"/>
+                <a:cs typeface="Noto Sans JP" pitchFamily="34" charset="-120"/>
               </a:rPr>
               <a:t>理解・判断</a:t>
             </a:r>
@@ -5913,9 +5913,9 @@
                 <a:solidFill>
                   <a:srgbClr val="FFFFFF"/>
                 </a:solidFill>
-                <a:latin typeface="Arial" pitchFamily="34" charset="0"/>
-                <a:ea typeface="Arial" pitchFamily="34" charset="-122"/>
-                <a:cs typeface="Arial" pitchFamily="34" charset="-120"/>
+                <a:latin typeface="Noto Sans JP" pitchFamily="34" charset="0"/>
+                <a:ea typeface="Noto Sans JP" pitchFamily="34" charset="-122"/>
+                <a:cs typeface="Noto Sans JP" pitchFamily="34" charset="-120"/>
               </a:rPr>
               <a:t>自動実行</a:t>
             </a:r>
@@ -5930,9 +5930,9 @@
                 <a:solidFill>
                   <a:srgbClr val="FFFFFF"/>
                 </a:solidFill>
-                <a:latin typeface="Arial" pitchFamily="34" charset="0"/>
-                <a:ea typeface="Arial" pitchFamily="34" charset="-122"/>
-                <a:cs typeface="Arial" pitchFamily="34" charset="-120"/>
+                <a:latin typeface="Noto Sans JP" pitchFamily="34" charset="0"/>
+                <a:ea typeface="Noto Sans JP" pitchFamily="34" charset="-122"/>
+                <a:cs typeface="Noto Sans JP" pitchFamily="34" charset="-120"/>
               </a:rPr>
               <a:t>＆返信</a:t>
             </a:r>
@@ -6019,9 +6019,9 @@
                 <a:solidFill>
                   <a:srgbClr val="FFFFFF"/>
                 </a:solidFill>
-                <a:latin typeface="Arial" pitchFamily="34" charset="0"/>
-                <a:ea typeface="Arial" pitchFamily="34" charset="-122"/>
-                <a:cs typeface="Arial" pitchFamily="34" charset="-120"/>
+                <a:latin typeface="Noto Sans JP" pitchFamily="34" charset="0"/>
+                <a:ea typeface="Noto Sans JP" pitchFamily="34" charset="-122"/>
+                <a:cs typeface="Noto Sans JP" pitchFamily="34" charset="-120"/>
               </a:rPr>
               <a:t>業務完了</a:t>
             </a:r>
@@ -6036,9 +6036,9 @@
                 <a:solidFill>
                   <a:srgbClr val="FFFFFF"/>
                 </a:solidFill>
-                <a:latin typeface="Arial" pitchFamily="34" charset="0"/>
-                <a:ea typeface="Arial" pitchFamily="34" charset="-122"/>
-                <a:cs typeface="Arial" pitchFamily="34" charset="-120"/>
+                <a:latin typeface="Noto Sans JP" pitchFamily="34" charset="0"/>
+                <a:ea typeface="Noto Sans JP" pitchFamily="34" charset="-122"/>
+                <a:cs typeface="Noto Sans JP" pitchFamily="34" charset="-120"/>
               </a:rPr>
               <a:t>報告</a:t>
             </a:r>
@@ -6102,9 +6102,9 @@
                 <a:solidFill>
                   <a:srgbClr val="4A90D9"/>
                 </a:solidFill>
-                <a:latin typeface="Arial" pitchFamily="34" charset="0"/>
-                <a:ea typeface="Arial" pitchFamily="34" charset="-122"/>
-                <a:cs typeface="Arial" pitchFamily="34" charset="-120"/>
+                <a:latin typeface="Noto Sans JP" pitchFamily="34" charset="0"/>
+                <a:ea typeface="Noto Sans JP" pitchFamily="34" charset="-122"/>
+                <a:cs typeface="Noto Sans JP" pitchFamily="34" charset="-120"/>
               </a:rPr>
               <a:t>スケジュール管理</a:t>
             </a:r>
@@ -6141,9 +6141,9 @@
                 <a:solidFill>
                   <a:srgbClr val="B0BAC9"/>
                 </a:solidFill>
-                <a:latin typeface="Arial" pitchFamily="34" charset="0"/>
-                <a:ea typeface="Arial" pitchFamily="34" charset="-122"/>
-                <a:cs typeface="Arial" pitchFamily="34" charset="-120"/>
+                <a:latin typeface="Noto Sans JP" pitchFamily="34" charset="0"/>
+                <a:ea typeface="Noto Sans JP" pitchFamily="34" charset="-122"/>
+                <a:cs typeface="Noto Sans JP" pitchFamily="34" charset="-120"/>
               </a:rPr>
               <a:t>Googleカレンダー連携</a:t>
             </a:r>
@@ -6158,9 +6158,9 @@
                 <a:solidFill>
                   <a:srgbClr val="B0BAC9"/>
                 </a:solidFill>
-                <a:latin typeface="Arial" pitchFamily="34" charset="0"/>
-                <a:ea typeface="Arial" pitchFamily="34" charset="-122"/>
-                <a:cs typeface="Arial" pitchFamily="34" charset="-120"/>
+                <a:latin typeface="Noto Sans JP" pitchFamily="34" charset="0"/>
+                <a:ea typeface="Noto Sans JP" pitchFamily="34" charset="-122"/>
+                <a:cs typeface="Noto Sans JP" pitchFamily="34" charset="-120"/>
               </a:rPr>
               <a:t>予定の確認・追加・リマインド</a:t>
             </a:r>
@@ -6224,9 +6224,9 @@
                 <a:solidFill>
                   <a:srgbClr val="4A90D9"/>
                 </a:solidFill>
-                <a:latin typeface="Arial" pitchFamily="34" charset="0"/>
-                <a:ea typeface="Arial" pitchFamily="34" charset="-122"/>
-                <a:cs typeface="Arial" pitchFamily="34" charset="-120"/>
+                <a:latin typeface="Noto Sans JP" pitchFamily="34" charset="0"/>
+                <a:ea typeface="Noto Sans JP" pitchFamily="34" charset="-122"/>
+                <a:cs typeface="Noto Sans JP" pitchFamily="34" charset="-120"/>
               </a:rPr>
               <a:t>SNS自動投稿</a:t>
             </a:r>
@@ -6263,9 +6263,9 @@
                 <a:solidFill>
                   <a:srgbClr val="B0BAC9"/>
                 </a:solidFill>
-                <a:latin typeface="Arial" pitchFamily="34" charset="0"/>
-                <a:ea typeface="Arial" pitchFamily="34" charset="-122"/>
-                <a:cs typeface="Arial" pitchFamily="34" charset="-120"/>
+                <a:latin typeface="Noto Sans JP" pitchFamily="34" charset="0"/>
+                <a:ea typeface="Noto Sans JP" pitchFamily="34" charset="-122"/>
+                <a:cs typeface="Noto Sans JP" pitchFamily="34" charset="-120"/>
               </a:rPr>
               <a:t>note.com, Threads, Xに</a:t>
             </a:r>
@@ -6280,9 +6280,9 @@
                 <a:solidFill>
                   <a:srgbClr val="B0BAC9"/>
                 </a:solidFill>
-                <a:latin typeface="Arial" pitchFamily="34" charset="0"/>
-                <a:ea typeface="Arial" pitchFamily="34" charset="-122"/>
-                <a:cs typeface="Arial" pitchFamily="34" charset="-120"/>
+                <a:latin typeface="Noto Sans JP" pitchFamily="34" charset="0"/>
+                <a:ea typeface="Noto Sans JP" pitchFamily="34" charset="-122"/>
+                <a:cs typeface="Noto Sans JP" pitchFamily="34" charset="-120"/>
               </a:rPr>
               <a:t>AIが記事生成・自動投稿</a:t>
             </a:r>
@@ -6346,9 +6346,9 @@
                 <a:solidFill>
                   <a:srgbClr val="4A90D9"/>
                 </a:solidFill>
-                <a:latin typeface="Arial" pitchFamily="34" charset="0"/>
-                <a:ea typeface="Arial" pitchFamily="34" charset="-122"/>
-                <a:cs typeface="Arial" pitchFamily="34" charset="-120"/>
+                <a:latin typeface="Noto Sans JP" pitchFamily="34" charset="0"/>
+                <a:ea typeface="Noto Sans JP" pitchFamily="34" charset="-122"/>
+                <a:cs typeface="Noto Sans JP" pitchFamily="34" charset="-120"/>
               </a:rPr>
               <a:t>経理リマインド</a:t>
             </a:r>
@@ -6385,9 +6385,9 @@
                 <a:solidFill>
                   <a:srgbClr val="B0BAC9"/>
                 </a:solidFill>
-                <a:latin typeface="Arial" pitchFamily="34" charset="0"/>
-                <a:ea typeface="Arial" pitchFamily="34" charset="-122"/>
-                <a:cs typeface="Arial" pitchFamily="34" charset="-120"/>
+                <a:latin typeface="Noto Sans JP" pitchFamily="34" charset="0"/>
+                <a:ea typeface="Noto Sans JP" pitchFamily="34" charset="-122"/>
+                <a:cs typeface="Noto Sans JP" pitchFamily="34" charset="-120"/>
               </a:rPr>
               <a:t>請求書発行タイミング通知</a:t>
             </a:r>
@@ -6402,9 +6402,9 @@
                 <a:solidFill>
                   <a:srgbClr val="B0BAC9"/>
                 </a:solidFill>
-                <a:latin typeface="Arial" pitchFamily="34" charset="0"/>
-                <a:ea typeface="Arial" pitchFamily="34" charset="-122"/>
-                <a:cs typeface="Arial" pitchFamily="34" charset="-120"/>
+                <a:latin typeface="Noto Sans JP" pitchFamily="34" charset="0"/>
+                <a:ea typeface="Noto Sans JP" pitchFamily="34" charset="-122"/>
+                <a:cs typeface="Noto Sans JP" pitchFamily="34" charset="-120"/>
               </a:rPr>
               <a:t>経費記録・月次レポート</a:t>
             </a:r>
@@ -6468,9 +6468,9 @@
                 <a:solidFill>
                   <a:srgbClr val="4A90D9"/>
                 </a:solidFill>
-                <a:latin typeface="Arial" pitchFamily="34" charset="0"/>
-                <a:ea typeface="Arial" pitchFamily="34" charset="-122"/>
-                <a:cs typeface="Arial" pitchFamily="34" charset="-120"/>
+                <a:latin typeface="Noto Sans JP" pitchFamily="34" charset="0"/>
+                <a:ea typeface="Noto Sans JP" pitchFamily="34" charset="-122"/>
+                <a:cs typeface="Noto Sans JP" pitchFamily="34" charset="-120"/>
               </a:rPr>
               <a:t>顧客対応</a:t>
             </a:r>
@@ -6507,9 +6507,9 @@
                 <a:solidFill>
                   <a:srgbClr val="B0BAC9"/>
                 </a:solidFill>
-                <a:latin typeface="Arial" pitchFamily="34" charset="0"/>
-                <a:ea typeface="Arial" pitchFamily="34" charset="-122"/>
-                <a:cs typeface="Arial" pitchFamily="34" charset="-120"/>
+                <a:latin typeface="Noto Sans JP" pitchFamily="34" charset="0"/>
+                <a:ea typeface="Noto Sans JP" pitchFamily="34" charset="-122"/>
+                <a:cs typeface="Noto Sans JP" pitchFamily="34" charset="-120"/>
               </a:rPr>
               <a:t>問い合わせ一次対応</a:t>
             </a:r>
@@ -6524,9 +6524,9 @@
                 <a:solidFill>
                   <a:srgbClr val="B0BAC9"/>
                 </a:solidFill>
-                <a:latin typeface="Arial" pitchFamily="34" charset="0"/>
-                <a:ea typeface="Arial" pitchFamily="34" charset="-122"/>
-                <a:cs typeface="Arial" pitchFamily="34" charset="-120"/>
+                <a:latin typeface="Noto Sans JP" pitchFamily="34" charset="0"/>
+                <a:ea typeface="Noto Sans JP" pitchFamily="34" charset="-122"/>
+                <a:cs typeface="Noto Sans JP" pitchFamily="34" charset="-120"/>
               </a:rPr>
               <a:t>FAQ自動回答・履歴管理</a:t>
             </a:r>
@@ -6595,9 +6595,9 @@
                 <a:solidFill>
                   <a:srgbClr val="1E2761"/>
                 </a:solidFill>
-                <a:latin typeface="Arial" pitchFamily="34" charset="0"/>
-                <a:ea typeface="Arial" pitchFamily="34" charset="-122"/>
-                <a:cs typeface="Arial" pitchFamily="34" charset="-120"/>
+                <a:latin typeface="Noto Sans JP" pitchFamily="34" charset="0"/>
+                <a:ea typeface="Noto Sans JP" pitchFamily="34" charset="-122"/>
+                <a:cs typeface="Noto Sans JP" pitchFamily="34" charset="-120"/>
               </a:rPr>
               <a:t>UX: なぜLINEなのか</a:t>
             </a:r>
@@ -6663,9 +6663,9 @@
                 <a:solidFill>
                   <a:srgbClr val="FFFFFF"/>
                 </a:solidFill>
-                <a:latin typeface="Arial" pitchFamily="34" charset="0"/>
-                <a:ea typeface="Arial" pitchFamily="34" charset="-122"/>
-                <a:cs typeface="Arial" pitchFamily="34" charset="-120"/>
+                <a:latin typeface="Noto Sans JP" pitchFamily="34" charset="0"/>
+                <a:ea typeface="Noto Sans JP" pitchFamily="34" charset="-122"/>
+                <a:cs typeface="Noto Sans JP" pitchFamily="34" charset="-120"/>
               </a:rPr>
               <a:t>LINE</a:t>
             </a:r>
@@ -6968,9 +6968,9 @@
                 <a:solidFill>
                   <a:srgbClr val="1E2761"/>
                 </a:solidFill>
-                <a:latin typeface="Arial" pitchFamily="34" charset="0"/>
-                <a:ea typeface="Arial" pitchFamily="34" charset="-122"/>
-                <a:cs typeface="Arial" pitchFamily="34" charset="-120"/>
+                <a:latin typeface="Noto Sans JP" pitchFamily="34" charset="0"/>
+                <a:ea typeface="Noto Sans JP" pitchFamily="34" charset="-122"/>
+                <a:cs typeface="Noto Sans JP" pitchFamily="34" charset="-120"/>
               </a:rPr>
               <a:t>1. ゼロ学習コスト</a:t>
             </a:r>
@@ -6985,9 +6985,9 @@
                 <a:solidFill>
                   <a:srgbClr val="8892A0"/>
                 </a:solidFill>
-                <a:latin typeface="Arial" pitchFamily="34" charset="0"/>
-                <a:ea typeface="Arial" pitchFamily="34" charset="-122"/>
-                <a:cs typeface="Arial" pitchFamily="34" charset="-120"/>
+                <a:latin typeface="Noto Sans JP" pitchFamily="34" charset="0"/>
+                <a:ea typeface="Noto Sans JP" pitchFamily="34" charset="-122"/>
+                <a:cs typeface="Noto Sans JP" pitchFamily="34" charset="-120"/>
               </a:rPr>
               <a:t>新しいアプリ不要。LINE友だち追加だけで即利用。</a:t>
             </a:r>
@@ -7002,9 +7002,9 @@
                 <a:solidFill>
                   <a:srgbClr val="A0A8B4"/>
                 </a:solidFill>
-                <a:latin typeface="Arial" pitchFamily="34" charset="0"/>
-                <a:ea typeface="Arial" pitchFamily="34" charset="-122"/>
-                <a:cs typeface="Arial" pitchFamily="34" charset="-120"/>
+                <a:latin typeface="Noto Sans JP" pitchFamily="34" charset="0"/>
+                <a:ea typeface="Noto Sans JP" pitchFamily="34" charset="-122"/>
+                <a:cs typeface="Noto Sans JP" pitchFamily="34" charset="-120"/>
               </a:rPr>
               <a:t>LINEは全年代利用率90%超（総務省2025年調査）</a:t>
             </a:r>
@@ -7025,9 +7025,9 @@
                 <a:solidFill>
                   <a:srgbClr val="1E2761"/>
                 </a:solidFill>
-                <a:latin typeface="Arial" pitchFamily="34" charset="0"/>
-                <a:ea typeface="Arial" pitchFamily="34" charset="-122"/>
-                <a:cs typeface="Arial" pitchFamily="34" charset="-120"/>
+                <a:latin typeface="Noto Sans JP" pitchFamily="34" charset="0"/>
+                <a:ea typeface="Noto Sans JP" pitchFamily="34" charset="-122"/>
+                <a:cs typeface="Noto Sans JP" pitchFamily="34" charset="-120"/>
               </a:rPr>
               <a:t>2. 自然言語で完結</a:t>
             </a:r>
@@ -7042,9 +7042,9 @@
                 <a:solidFill>
                   <a:srgbClr val="8892A0"/>
                 </a:solidFill>
-                <a:latin typeface="Arial" pitchFamily="34" charset="0"/>
-                <a:ea typeface="Arial" pitchFamily="34" charset="-122"/>
-                <a:cs typeface="Arial" pitchFamily="34" charset="-120"/>
+                <a:latin typeface="Noto Sans JP" pitchFamily="34" charset="0"/>
+                <a:ea typeface="Noto Sans JP" pitchFamily="34" charset="-122"/>
+                <a:cs typeface="Noto Sans JP" pitchFamily="34" charset="-120"/>
               </a:rPr>
               <a:t>マニュアル不要。友達にLINEする感覚で業務依頼。</a:t>
             </a:r>
@@ -7059,9 +7059,9 @@
                 <a:solidFill>
                   <a:srgbClr val="A0A8B4"/>
                 </a:solidFill>
-                <a:latin typeface="Arial" pitchFamily="34" charset="0"/>
-                <a:ea typeface="Arial" pitchFamily="34" charset="-122"/>
-                <a:cs typeface="Arial" pitchFamily="34" charset="-120"/>
+                <a:latin typeface="Noto Sans JP" pitchFamily="34" charset="0"/>
+                <a:ea typeface="Noto Sans JP" pitchFamily="34" charset="-122"/>
+                <a:cs typeface="Noto Sans JP" pitchFamily="34" charset="-120"/>
               </a:rPr>
               <a:t>LINE公式アカウント「便利」回答率8割（モビルス2025）</a:t>
             </a:r>
@@ -7082,9 +7082,9 @@
                 <a:solidFill>
                   <a:srgbClr val="1E2761"/>
                 </a:solidFill>
-                <a:latin typeface="Arial" pitchFamily="34" charset="0"/>
-                <a:ea typeface="Arial" pitchFamily="34" charset="-122"/>
-                <a:cs typeface="Arial" pitchFamily="34" charset="-120"/>
+                <a:latin typeface="Noto Sans JP" pitchFamily="34" charset="0"/>
+                <a:ea typeface="Noto Sans JP" pitchFamily="34" charset="-122"/>
+                <a:cs typeface="Noto Sans JP" pitchFamily="34" charset="-120"/>
               </a:rPr>
               <a:t>3. 24時間対応 × 学習する秘書</a:t>
             </a:r>
@@ -7099,9 +7099,9 @@
                 <a:solidFill>
                   <a:srgbClr val="8892A0"/>
                 </a:solidFill>
-                <a:latin typeface="Arial" pitchFamily="34" charset="0"/>
-                <a:ea typeface="Arial" pitchFamily="34" charset="-122"/>
-                <a:cs typeface="Arial" pitchFamily="34" charset="-120"/>
+                <a:latin typeface="Noto Sans JP" pitchFamily="34" charset="0"/>
+                <a:ea typeface="Noto Sans JP" pitchFamily="34" charset="-122"/>
+                <a:cs typeface="Noto Sans JP" pitchFamily="34" charset="-120"/>
               </a:rPr>
               <a:t>深夜のメモも早朝の確認もAIが即対応。</a:t>
             </a:r>
@@ -7116,9 +7116,9 @@
                 <a:solidFill>
                   <a:srgbClr val="8892A0"/>
                 </a:solidFill>
-                <a:latin typeface="Arial" pitchFamily="34" charset="0"/>
-                <a:ea typeface="Arial" pitchFamily="34" charset="-122"/>
-                <a:cs typeface="Arial" pitchFamily="34" charset="-120"/>
+                <a:latin typeface="Noto Sans JP" pitchFamily="34" charset="0"/>
+                <a:ea typeface="Noto Sans JP" pitchFamily="34" charset="-122"/>
+                <a:cs typeface="Noto Sans JP" pitchFamily="34" charset="-120"/>
               </a:rPr>
               <a:t>使うほどあなたの仕事スタイルを理解。</a:t>
             </a:r>
@@ -7187,9 +7187,9 @@
                 <a:solidFill>
                   <a:srgbClr val="1E2761"/>
                 </a:solidFill>
-                <a:latin typeface="Arial" pitchFamily="34" charset="0"/>
-                <a:ea typeface="Arial" pitchFamily="34" charset="-122"/>
-                <a:cs typeface="Arial" pitchFamily="34" charset="-120"/>
+                <a:latin typeface="Noto Sans JP" pitchFamily="34" charset="0"/>
+                <a:ea typeface="Noto Sans JP" pitchFamily="34" charset="-122"/>
+                <a:cs typeface="Noto Sans JP" pitchFamily="34" charset="-120"/>
               </a:rPr>
               <a:t>ビジネスモデル &amp; 収益予測</a:t>
             </a:r>
@@ -7273,9 +7273,9 @@
                 <a:solidFill>
                   <a:srgbClr val="FFFFFF"/>
                 </a:solidFill>
-                <a:latin typeface="Arial" pitchFamily="34" charset="0"/>
-                <a:ea typeface="Arial" pitchFamily="34" charset="-122"/>
-                <a:cs typeface="Arial" pitchFamily="34" charset="-120"/>
+                <a:latin typeface="Noto Sans JP" pitchFamily="34" charset="0"/>
+                <a:ea typeface="Noto Sans JP" pitchFamily="34" charset="-122"/>
+                <a:cs typeface="Noto Sans JP" pitchFamily="34" charset="-120"/>
               </a:rPr>
               <a:t>ライト</a:t>
             </a:r>
@@ -7312,9 +7312,9 @@
                 <a:solidFill>
                   <a:srgbClr val="1A1A2E"/>
                 </a:solidFill>
-                <a:latin typeface="Arial" pitchFamily="34" charset="0"/>
-                <a:ea typeface="Arial" pitchFamily="34" charset="-122"/>
-                <a:cs typeface="Arial" pitchFamily="34" charset="-120"/>
+                <a:latin typeface="Noto Sans JP" pitchFamily="34" charset="0"/>
+                <a:ea typeface="Noto Sans JP" pitchFamily="34" charset="-122"/>
+                <a:cs typeface="Noto Sans JP" pitchFamily="34" charset="-120"/>
               </a:rPr>
               <a:t>¥9,800</a:t>
             </a:r>
@@ -7326,9 +7326,9 @@
                 <a:solidFill>
                   <a:srgbClr val="8892A0"/>
                 </a:solidFill>
-                <a:latin typeface="Arial" pitchFamily="34" charset="0"/>
-                <a:ea typeface="Arial" pitchFamily="34" charset="-122"/>
-                <a:cs typeface="Arial" pitchFamily="34" charset="-120"/>
+                <a:latin typeface="Noto Sans JP" pitchFamily="34" charset="0"/>
+                <a:ea typeface="Noto Sans JP" pitchFamily="34" charset="-122"/>
+                <a:cs typeface="Noto Sans JP" pitchFamily="34" charset="-120"/>
               </a:rPr>
               <a:t> /月</a:t>
             </a:r>
@@ -7365,9 +7365,9 @@
                 <a:solidFill>
                   <a:srgbClr val="8892A0"/>
                 </a:solidFill>
-                <a:latin typeface="Arial" pitchFamily="34" charset="0"/>
-                <a:ea typeface="Arial" pitchFamily="34" charset="-122"/>
-                <a:cs typeface="Arial" pitchFamily="34" charset="-120"/>
+                <a:latin typeface="Noto Sans JP" pitchFamily="34" charset="0"/>
+                <a:ea typeface="Noto Sans JP" pitchFamily="34" charset="-122"/>
+                <a:cs typeface="Noto Sans JP" pitchFamily="34" charset="-120"/>
               </a:rPr>
               <a:t>スケジュール管理</a:t>
             </a:r>
@@ -7382,9 +7382,9 @@
                 <a:solidFill>
                   <a:srgbClr val="8892A0"/>
                 </a:solidFill>
-                <a:latin typeface="Arial" pitchFamily="34" charset="0"/>
-                <a:ea typeface="Arial" pitchFamily="34" charset="-122"/>
-                <a:cs typeface="Arial" pitchFamily="34" charset="-120"/>
+                <a:latin typeface="Noto Sans JP" pitchFamily="34" charset="0"/>
+                <a:ea typeface="Noto Sans JP" pitchFamily="34" charset="-122"/>
+                <a:cs typeface="Noto Sans JP" pitchFamily="34" charset="-120"/>
               </a:rPr>
               <a:t>TODO管理</a:t>
             </a:r>
@@ -7399,9 +7399,9 @@
                 <a:solidFill>
                   <a:srgbClr val="8892A0"/>
                 </a:solidFill>
-                <a:latin typeface="Arial" pitchFamily="34" charset="0"/>
-                <a:ea typeface="Arial" pitchFamily="34" charset="-122"/>
-                <a:cs typeface="Arial" pitchFamily="34" charset="-120"/>
+                <a:latin typeface="Noto Sans JP" pitchFamily="34" charset="0"/>
+                <a:ea typeface="Noto Sans JP" pitchFamily="34" charset="-122"/>
+                <a:cs typeface="Noto Sans JP" pitchFamily="34" charset="-120"/>
               </a:rPr>
               <a:t>天気・情報検索</a:t>
             </a:r>
@@ -7416,9 +7416,9 @@
                 <a:solidFill>
                   <a:srgbClr val="8892A0"/>
                 </a:solidFill>
-                <a:latin typeface="Arial" pitchFamily="34" charset="0"/>
-                <a:ea typeface="Arial" pitchFamily="34" charset="-122"/>
-                <a:cs typeface="Arial" pitchFamily="34" charset="-120"/>
+                <a:latin typeface="Noto Sans JP" pitchFamily="34" charset="0"/>
+                <a:ea typeface="Noto Sans JP" pitchFamily="34" charset="-122"/>
+                <a:cs typeface="Noto Sans JP" pitchFamily="34" charset="-120"/>
               </a:rPr>
               <a:t>SNS 1アカウント</a:t>
             </a:r>
@@ -7502,9 +7502,9 @@
                 <a:solidFill>
                   <a:srgbClr val="FFFFFF"/>
                 </a:solidFill>
-                <a:latin typeface="Arial" pitchFamily="34" charset="0"/>
-                <a:ea typeface="Arial" pitchFamily="34" charset="-122"/>
-                <a:cs typeface="Arial" pitchFamily="34" charset="-120"/>
+                <a:latin typeface="Noto Sans JP" pitchFamily="34" charset="0"/>
+                <a:ea typeface="Noto Sans JP" pitchFamily="34" charset="-122"/>
+                <a:cs typeface="Noto Sans JP" pitchFamily="34" charset="-120"/>
               </a:rPr>
               <a:t>スタンダード</a:t>
             </a:r>
@@ -7541,9 +7541,9 @@
                 <a:solidFill>
                   <a:srgbClr val="1A1A2E"/>
                 </a:solidFill>
-                <a:latin typeface="Arial" pitchFamily="34" charset="0"/>
-                <a:ea typeface="Arial" pitchFamily="34" charset="-122"/>
-                <a:cs typeface="Arial" pitchFamily="34" charset="-120"/>
+                <a:latin typeface="Noto Sans JP" pitchFamily="34" charset="0"/>
+                <a:ea typeface="Noto Sans JP" pitchFamily="34" charset="-122"/>
+                <a:cs typeface="Noto Sans JP" pitchFamily="34" charset="-120"/>
               </a:rPr>
               <a:t>¥19,800</a:t>
             </a:r>
@@ -7555,9 +7555,9 @@
                 <a:solidFill>
                   <a:srgbClr val="8892A0"/>
                 </a:solidFill>
-                <a:latin typeface="Arial" pitchFamily="34" charset="0"/>
-                <a:ea typeface="Arial" pitchFamily="34" charset="-122"/>
-                <a:cs typeface="Arial" pitchFamily="34" charset="-120"/>
+                <a:latin typeface="Noto Sans JP" pitchFamily="34" charset="0"/>
+                <a:ea typeface="Noto Sans JP" pitchFamily="34" charset="-122"/>
+                <a:cs typeface="Noto Sans JP" pitchFamily="34" charset="-120"/>
               </a:rPr>
               <a:t> /月</a:t>
             </a:r>
@@ -7594,9 +7594,9 @@
                 <a:solidFill>
                   <a:srgbClr val="8892A0"/>
                 </a:solidFill>
-                <a:latin typeface="Arial" pitchFamily="34" charset="0"/>
-                <a:ea typeface="Arial" pitchFamily="34" charset="-122"/>
-                <a:cs typeface="Arial" pitchFamily="34" charset="-120"/>
+                <a:latin typeface="Noto Sans JP" pitchFamily="34" charset="0"/>
+                <a:ea typeface="Noto Sans JP" pitchFamily="34" charset="-122"/>
+                <a:cs typeface="Noto Sans JP" pitchFamily="34" charset="-120"/>
               </a:rPr>
               <a:t>ライト全機能 +</a:t>
             </a:r>
@@ -7611,9 +7611,9 @@
                 <a:solidFill>
                   <a:srgbClr val="8892A0"/>
                 </a:solidFill>
-                <a:latin typeface="Arial" pitchFamily="34" charset="0"/>
-                <a:ea typeface="Arial" pitchFamily="34" charset="-122"/>
-                <a:cs typeface="Arial" pitchFamily="34" charset="-120"/>
+                <a:latin typeface="Noto Sans JP" pitchFamily="34" charset="0"/>
+                <a:ea typeface="Noto Sans JP" pitchFamily="34" charset="-122"/>
+                <a:cs typeface="Noto Sans JP" pitchFamily="34" charset="-120"/>
               </a:rPr>
               <a:t>SNS 3アカウント</a:t>
             </a:r>
@@ -7628,9 +7628,9 @@
                 <a:solidFill>
                   <a:srgbClr val="8892A0"/>
                 </a:solidFill>
-                <a:latin typeface="Arial" pitchFamily="34" charset="0"/>
-                <a:ea typeface="Arial" pitchFamily="34" charset="-122"/>
-                <a:cs typeface="Arial" pitchFamily="34" charset="-120"/>
+                <a:latin typeface="Noto Sans JP" pitchFamily="34" charset="0"/>
+                <a:ea typeface="Noto Sans JP" pitchFamily="34" charset="-122"/>
+                <a:cs typeface="Noto Sans JP" pitchFamily="34" charset="-120"/>
               </a:rPr>
               <a:t>経理リマインド</a:t>
             </a:r>
@@ -7645,9 +7645,9 @@
                 <a:solidFill>
                   <a:srgbClr val="8892A0"/>
                 </a:solidFill>
-                <a:latin typeface="Arial" pitchFamily="34" charset="0"/>
-                <a:ea typeface="Arial" pitchFamily="34" charset="-122"/>
-                <a:cs typeface="Arial" pitchFamily="34" charset="-120"/>
+                <a:latin typeface="Noto Sans JP" pitchFamily="34" charset="0"/>
+                <a:ea typeface="Noto Sans JP" pitchFamily="34" charset="-122"/>
+                <a:cs typeface="Noto Sans JP" pitchFamily="34" charset="-120"/>
               </a:rPr>
               <a:t>顧客対応bot</a:t>
             </a:r>
@@ -7662,9 +7662,9 @@
                 <a:solidFill>
                   <a:srgbClr val="8892A0"/>
                 </a:solidFill>
-                <a:latin typeface="Arial" pitchFamily="34" charset="0"/>
-                <a:ea typeface="Arial" pitchFamily="34" charset="-122"/>
-                <a:cs typeface="Arial" pitchFamily="34" charset="-120"/>
+                <a:latin typeface="Noto Sans JP" pitchFamily="34" charset="0"/>
+                <a:ea typeface="Noto Sans JP" pitchFamily="34" charset="-122"/>
+                <a:cs typeface="Noto Sans JP" pitchFamily="34" charset="-120"/>
               </a:rPr>
               <a:t>部門AI（5部門）</a:t>
             </a:r>
@@ -7748,9 +7748,9 @@
                 <a:solidFill>
                   <a:srgbClr val="FFFFFF"/>
                 </a:solidFill>
-                <a:latin typeface="Arial" pitchFamily="34" charset="0"/>
-                <a:ea typeface="Arial" pitchFamily="34" charset="-122"/>
-                <a:cs typeface="Arial" pitchFamily="34" charset="-120"/>
+                <a:latin typeface="Noto Sans JP" pitchFamily="34" charset="0"/>
+                <a:ea typeface="Noto Sans JP" pitchFamily="34" charset="-122"/>
+                <a:cs typeface="Noto Sans JP" pitchFamily="34" charset="-120"/>
               </a:rPr>
               <a:t>プロ</a:t>
             </a:r>
@@ -7787,9 +7787,9 @@
                 <a:solidFill>
                   <a:srgbClr val="1A1A2E"/>
                 </a:solidFill>
-                <a:latin typeface="Arial" pitchFamily="34" charset="0"/>
-                <a:ea typeface="Arial" pitchFamily="34" charset="-122"/>
-                <a:cs typeface="Arial" pitchFamily="34" charset="-120"/>
+                <a:latin typeface="Noto Sans JP" pitchFamily="34" charset="0"/>
+                <a:ea typeface="Noto Sans JP" pitchFamily="34" charset="-122"/>
+                <a:cs typeface="Noto Sans JP" pitchFamily="34" charset="-120"/>
               </a:rPr>
               <a:t>¥39,800</a:t>
             </a:r>
@@ -7801,9 +7801,9 @@
                 <a:solidFill>
                   <a:srgbClr val="8892A0"/>
                 </a:solidFill>
-                <a:latin typeface="Arial" pitchFamily="34" charset="0"/>
-                <a:ea typeface="Arial" pitchFamily="34" charset="-122"/>
-                <a:cs typeface="Arial" pitchFamily="34" charset="-120"/>
+                <a:latin typeface="Noto Sans JP" pitchFamily="34" charset="0"/>
+                <a:ea typeface="Noto Sans JP" pitchFamily="34" charset="-122"/>
+                <a:cs typeface="Noto Sans JP" pitchFamily="34" charset="-120"/>
               </a:rPr>
               <a:t> /月</a:t>
             </a:r>
@@ -7840,9 +7840,9 @@
                 <a:solidFill>
                   <a:srgbClr val="8892A0"/>
                 </a:solidFill>
-                <a:latin typeface="Arial" pitchFamily="34" charset="0"/>
-                <a:ea typeface="Arial" pitchFamily="34" charset="-122"/>
-                <a:cs typeface="Arial" pitchFamily="34" charset="-120"/>
+                <a:latin typeface="Noto Sans JP" pitchFamily="34" charset="0"/>
+                <a:ea typeface="Noto Sans JP" pitchFamily="34" charset="-122"/>
+                <a:cs typeface="Noto Sans JP" pitchFamily="34" charset="-120"/>
               </a:rPr>
               <a:t>スタンダード全機能 +</a:t>
             </a:r>
@@ -7857,9 +7857,9 @@
                 <a:solidFill>
                   <a:srgbClr val="8892A0"/>
                 </a:solidFill>
-                <a:latin typeface="Arial" pitchFamily="34" charset="0"/>
-                <a:ea typeface="Arial" pitchFamily="34" charset="-122"/>
-                <a:cs typeface="Arial" pitchFamily="34" charset="-120"/>
+                <a:latin typeface="Noto Sans JP" pitchFamily="34" charset="0"/>
+                <a:ea typeface="Noto Sans JP" pitchFamily="34" charset="-122"/>
+                <a:cs typeface="Noto Sans JP" pitchFamily="34" charset="-120"/>
               </a:rPr>
               <a:t>SNS無制限</a:t>
             </a:r>
@@ -7874,9 +7874,9 @@
                 <a:solidFill>
                   <a:srgbClr val="8892A0"/>
                 </a:solidFill>
-                <a:latin typeface="Arial" pitchFamily="34" charset="0"/>
-                <a:ea typeface="Arial" pitchFamily="34" charset="-122"/>
-                <a:cs typeface="Arial" pitchFamily="34" charset="-120"/>
+                <a:latin typeface="Noto Sans JP" pitchFamily="34" charset="0"/>
+                <a:ea typeface="Noto Sans JP" pitchFamily="34" charset="-122"/>
+                <a:cs typeface="Noto Sans JP" pitchFamily="34" charset="-120"/>
               </a:rPr>
               <a:t>部門AI（全部門）</a:t>
             </a:r>
@@ -7891,9 +7891,9 @@
                 <a:solidFill>
                   <a:srgbClr val="8892A0"/>
                 </a:solidFill>
-                <a:latin typeface="Arial" pitchFamily="34" charset="0"/>
-                <a:ea typeface="Arial" pitchFamily="34" charset="-122"/>
-                <a:cs typeface="Arial" pitchFamily="34" charset="-120"/>
+                <a:latin typeface="Noto Sans JP" pitchFamily="34" charset="0"/>
+                <a:ea typeface="Noto Sans JP" pitchFamily="34" charset="-122"/>
+                <a:cs typeface="Noto Sans JP" pitchFamily="34" charset="-120"/>
               </a:rPr>
               <a:t>カスタム自動化</a:t>
             </a:r>
@@ -7908,9 +7908,9 @@
                 <a:solidFill>
                   <a:srgbClr val="8892A0"/>
                 </a:solidFill>
-                <a:latin typeface="Arial" pitchFamily="34" charset="0"/>
-                <a:ea typeface="Arial" pitchFamily="34" charset="-122"/>
-                <a:cs typeface="Arial" pitchFamily="34" charset="-120"/>
+                <a:latin typeface="Noto Sans JP" pitchFamily="34" charset="0"/>
+                <a:ea typeface="Noto Sans JP" pitchFamily="34" charset="-122"/>
+                <a:cs typeface="Noto Sans JP" pitchFamily="34" charset="-120"/>
               </a:rPr>
               <a:t>優先サポート</a:t>
             </a:r>
@@ -7947,9 +7947,9 @@
                 <a:solidFill>
                   <a:srgbClr val="1E2761"/>
                 </a:solidFill>
-                <a:latin typeface="Arial" pitchFamily="34" charset="0"/>
-                <a:ea typeface="Arial" pitchFamily="34" charset="-122"/>
-                <a:cs typeface="Arial" pitchFamily="34" charset="-120"/>
+                <a:latin typeface="Noto Sans JP" pitchFamily="34" charset="0"/>
+                <a:ea typeface="Noto Sans JP" pitchFamily="34" charset="-122"/>
+                <a:cs typeface="Noto Sans JP" pitchFamily="34" charset="-120"/>
               </a:rPr>
               <a:t>収益予測（保守的シナリオ）</a:t>
             </a:r>
@@ -7995,9 +7995,9 @@
                         <a:buNone/>
                       </a:pPr>
                       <a:endParaRPr lang="en-US" sz="1000" dirty="0">
-                        <a:latin typeface="Arial" charset="0"/>
-                        <a:ea typeface="Arial" charset="0"/>
-                        <a:cs typeface="Arial" charset="0"/>
+                        <a:latin typeface="Noto Sans JP" charset="0"/>
+                        <a:ea typeface="Noto Sans JP" charset="0"/>
+                        <a:cs typeface="Noto Sans JP" charset="0"/>
                       </a:endParaRPr>
                     </a:p>
                   </a:txBody>
@@ -8056,16 +8056,16 @@
                           <a:solidFill>
                             <a:srgbClr val="FFFFFF"/>
                           </a:solidFill>
-                          <a:latin typeface="Arial" pitchFamily="34" charset="0"/>
-                          <a:ea typeface="Arial" pitchFamily="34" charset="-122"/>
-                          <a:cs typeface="Arial" pitchFamily="34" charset="-120"/>
+                          <a:latin typeface="Noto Sans JP" pitchFamily="34" charset="0"/>
+                          <a:ea typeface="Noto Sans JP" pitchFamily="34" charset="-122"/>
+                          <a:cs typeface="Noto Sans JP" pitchFamily="34" charset="-120"/>
                         </a:rPr>
                         <a:t>6ヶ月目</a:t>
                       </a:r>
                       <a:endParaRPr lang="en-US" sz="1000" dirty="0">
-                        <a:latin typeface="Arial" charset="0"/>
-                        <a:ea typeface="Arial" charset="0"/>
-                        <a:cs typeface="Arial" charset="0"/>
+                        <a:latin typeface="Noto Sans JP" charset="0"/>
+                        <a:ea typeface="Noto Sans JP" charset="0"/>
+                        <a:cs typeface="Noto Sans JP" charset="0"/>
                       </a:endParaRPr>
                     </a:p>
                   </a:txBody>
@@ -8124,16 +8124,16 @@
                           <a:solidFill>
                             <a:srgbClr val="FFFFFF"/>
                           </a:solidFill>
-                          <a:latin typeface="Arial" pitchFamily="34" charset="0"/>
-                          <a:ea typeface="Arial" pitchFamily="34" charset="-122"/>
-                          <a:cs typeface="Arial" pitchFamily="34" charset="-120"/>
+                          <a:latin typeface="Noto Sans JP" pitchFamily="34" charset="0"/>
+                          <a:ea typeface="Noto Sans JP" pitchFamily="34" charset="-122"/>
+                          <a:cs typeface="Noto Sans JP" pitchFamily="34" charset="-120"/>
                         </a:rPr>
                         <a:t>12ヶ月目</a:t>
                       </a:r>
                       <a:endParaRPr lang="en-US" sz="1000" dirty="0">
-                        <a:latin typeface="Arial" charset="0"/>
-                        <a:ea typeface="Arial" charset="0"/>
-                        <a:cs typeface="Arial" charset="0"/>
+                        <a:latin typeface="Noto Sans JP" charset="0"/>
+                        <a:ea typeface="Noto Sans JP" charset="0"/>
+                        <a:cs typeface="Noto Sans JP" charset="0"/>
                       </a:endParaRPr>
                     </a:p>
                   </a:txBody>
@@ -8192,16 +8192,16 @@
                           <a:solidFill>
                             <a:srgbClr val="FFFFFF"/>
                           </a:solidFill>
-                          <a:latin typeface="Arial" pitchFamily="34" charset="0"/>
-                          <a:ea typeface="Arial" pitchFamily="34" charset="-122"/>
-                          <a:cs typeface="Arial" pitchFamily="34" charset="-120"/>
+                          <a:latin typeface="Noto Sans JP" pitchFamily="34" charset="0"/>
+                          <a:ea typeface="Noto Sans JP" pitchFamily="34" charset="-122"/>
+                          <a:cs typeface="Noto Sans JP" pitchFamily="34" charset="-120"/>
                         </a:rPr>
                         <a:t>24ヶ月目</a:t>
                       </a:r>
                       <a:endParaRPr lang="en-US" sz="1000" dirty="0">
-                        <a:latin typeface="Arial" charset="0"/>
-                        <a:ea typeface="Arial" charset="0"/>
-                        <a:cs typeface="Arial" charset="0"/>
+                        <a:latin typeface="Noto Sans JP" charset="0"/>
+                        <a:ea typeface="Noto Sans JP" charset="0"/>
+                        <a:cs typeface="Noto Sans JP" charset="0"/>
                       </a:endParaRPr>
                     </a:p>
                   </a:txBody>
@@ -8262,16 +8262,16 @@
                           <a:solidFill>
                             <a:srgbClr val="000000"/>
                           </a:solidFill>
-                          <a:latin typeface="Arial" pitchFamily="34" charset="0"/>
-                          <a:ea typeface="Arial" pitchFamily="34" charset="-122"/>
-                          <a:cs typeface="Arial" pitchFamily="34" charset="-120"/>
+                          <a:latin typeface="Noto Sans JP" pitchFamily="34" charset="0"/>
+                          <a:ea typeface="Noto Sans JP" pitchFamily="34" charset="-122"/>
+                          <a:cs typeface="Noto Sans JP" pitchFamily="34" charset="-120"/>
                         </a:rPr>
                         <a:t>有料ユーザー数</a:t>
                       </a:r>
                       <a:endParaRPr lang="en-US" sz="1000" dirty="0">
-                        <a:latin typeface="Arial" charset="0"/>
-                        <a:ea typeface="Arial" charset="0"/>
-                        <a:cs typeface="Arial" charset="0"/>
+                        <a:latin typeface="Noto Sans JP" charset="0"/>
+                        <a:ea typeface="Noto Sans JP" charset="0"/>
+                        <a:cs typeface="Noto Sans JP" charset="0"/>
                       </a:endParaRPr>
                     </a:p>
                   </a:txBody>
@@ -8327,16 +8327,16 @@
                           <a:solidFill>
                             <a:srgbClr val="000000"/>
                           </a:solidFill>
-                          <a:latin typeface="Arial" pitchFamily="34" charset="0"/>
-                          <a:ea typeface="Arial" pitchFamily="34" charset="-122"/>
-                          <a:cs typeface="Arial" pitchFamily="34" charset="-120"/>
+                          <a:latin typeface="Noto Sans JP" pitchFamily="34" charset="0"/>
+                          <a:ea typeface="Noto Sans JP" pitchFamily="34" charset="-122"/>
+                          <a:cs typeface="Noto Sans JP" pitchFamily="34" charset="-120"/>
                         </a:rPr>
                         <a:t>50人</a:t>
                       </a:r>
                       <a:endParaRPr lang="en-US" sz="1000" dirty="0">
-                        <a:latin typeface="Arial" charset="0"/>
-                        <a:ea typeface="Arial" charset="0"/>
-                        <a:cs typeface="Arial" charset="0"/>
+                        <a:latin typeface="Noto Sans JP" charset="0"/>
+                        <a:ea typeface="Noto Sans JP" charset="0"/>
+                        <a:cs typeface="Noto Sans JP" charset="0"/>
                       </a:endParaRPr>
                     </a:p>
                   </a:txBody>
@@ -8392,16 +8392,16 @@
                           <a:solidFill>
                             <a:srgbClr val="000000"/>
                           </a:solidFill>
-                          <a:latin typeface="Arial" pitchFamily="34" charset="0"/>
-                          <a:ea typeface="Arial" pitchFamily="34" charset="-122"/>
-                          <a:cs typeface="Arial" pitchFamily="34" charset="-120"/>
+                          <a:latin typeface="Noto Sans JP" pitchFamily="34" charset="0"/>
+                          <a:ea typeface="Noto Sans JP" pitchFamily="34" charset="-122"/>
+                          <a:cs typeface="Noto Sans JP" pitchFamily="34" charset="-120"/>
                         </a:rPr>
                         <a:t>500人</a:t>
                       </a:r>
                       <a:endParaRPr lang="en-US" sz="1000" dirty="0">
-                        <a:latin typeface="Arial" charset="0"/>
-                        <a:ea typeface="Arial" charset="0"/>
-                        <a:cs typeface="Arial" charset="0"/>
+                        <a:latin typeface="Noto Sans JP" charset="0"/>
+                        <a:ea typeface="Noto Sans JP" charset="0"/>
+                        <a:cs typeface="Noto Sans JP" charset="0"/>
                       </a:endParaRPr>
                     </a:p>
                   </a:txBody>
@@ -8457,16 +8457,16 @@
                           <a:solidFill>
                             <a:srgbClr val="000000"/>
                           </a:solidFill>
-                          <a:latin typeface="Arial" pitchFamily="34" charset="0"/>
-                          <a:ea typeface="Arial" pitchFamily="34" charset="-122"/>
-                          <a:cs typeface="Arial" pitchFamily="34" charset="-120"/>
+                          <a:latin typeface="Noto Sans JP" pitchFamily="34" charset="0"/>
+                          <a:ea typeface="Noto Sans JP" pitchFamily="34" charset="-122"/>
+                          <a:cs typeface="Noto Sans JP" pitchFamily="34" charset="-120"/>
                         </a:rPr>
                         <a:t>2,000人</a:t>
                       </a:r>
                       <a:endParaRPr lang="en-US" sz="1000" dirty="0">
-                        <a:latin typeface="Arial" charset="0"/>
-                        <a:ea typeface="Arial" charset="0"/>
-                        <a:cs typeface="Arial" charset="0"/>
+                        <a:latin typeface="Noto Sans JP" charset="0"/>
+                        <a:ea typeface="Noto Sans JP" charset="0"/>
+                        <a:cs typeface="Noto Sans JP" charset="0"/>
                       </a:endParaRPr>
                     </a:p>
                   </a:txBody>
@@ -8524,16 +8524,16 @@
                           <a:solidFill>
                             <a:srgbClr val="000000"/>
                           </a:solidFill>
-                          <a:latin typeface="Arial" pitchFamily="34" charset="0"/>
-                          <a:ea typeface="Arial" pitchFamily="34" charset="-122"/>
-                          <a:cs typeface="Arial" pitchFamily="34" charset="-120"/>
+                          <a:latin typeface="Noto Sans JP" pitchFamily="34" charset="0"/>
+                          <a:ea typeface="Noto Sans JP" pitchFamily="34" charset="-122"/>
+                          <a:cs typeface="Noto Sans JP" pitchFamily="34" charset="-120"/>
                         </a:rPr>
                         <a:t>月間売上</a:t>
                       </a:r>
                       <a:endParaRPr lang="en-US" sz="1000" dirty="0">
-                        <a:latin typeface="Arial" charset="0"/>
-                        <a:ea typeface="Arial" charset="0"/>
-                        <a:cs typeface="Arial" charset="0"/>
+                        <a:latin typeface="Noto Sans JP" charset="0"/>
+                        <a:ea typeface="Noto Sans JP" charset="0"/>
+                        <a:cs typeface="Noto Sans JP" charset="0"/>
                       </a:endParaRPr>
                     </a:p>
                   </a:txBody>
@@ -8589,16 +8589,16 @@
                           <a:solidFill>
                             <a:srgbClr val="000000"/>
                           </a:solidFill>
-                          <a:latin typeface="Arial" pitchFamily="34" charset="0"/>
-                          <a:ea typeface="Arial" pitchFamily="34" charset="-122"/>
-                          <a:cs typeface="Arial" pitchFamily="34" charset="-120"/>
+                          <a:latin typeface="Noto Sans JP" pitchFamily="34" charset="0"/>
+                          <a:ea typeface="Noto Sans JP" pitchFamily="34" charset="-122"/>
+                          <a:cs typeface="Noto Sans JP" pitchFamily="34" charset="-120"/>
                         </a:rPr>
                         <a:t>60万円</a:t>
                       </a:r>
                       <a:endParaRPr lang="en-US" sz="1000" dirty="0">
-                        <a:latin typeface="Arial" charset="0"/>
-                        <a:ea typeface="Arial" charset="0"/>
-                        <a:cs typeface="Arial" charset="0"/>
+                        <a:latin typeface="Noto Sans JP" charset="0"/>
+                        <a:ea typeface="Noto Sans JP" charset="0"/>
+                        <a:cs typeface="Noto Sans JP" charset="0"/>
                       </a:endParaRPr>
                     </a:p>
                   </a:txBody>
@@ -8654,16 +8654,16 @@
                           <a:solidFill>
                             <a:srgbClr val="000000"/>
                           </a:solidFill>
-                          <a:latin typeface="Arial" pitchFamily="34" charset="0"/>
-                          <a:ea typeface="Arial" pitchFamily="34" charset="-122"/>
-                          <a:cs typeface="Arial" pitchFamily="34" charset="-120"/>
+                          <a:latin typeface="Noto Sans JP" pitchFamily="34" charset="0"/>
+                          <a:ea typeface="Noto Sans JP" pitchFamily="34" charset="-122"/>
+                          <a:cs typeface="Noto Sans JP" pitchFamily="34" charset="-120"/>
                         </a:rPr>
                         <a:t>600万円</a:t>
                       </a:r>
                       <a:endParaRPr lang="en-US" sz="1000" dirty="0">
-                        <a:latin typeface="Arial" charset="0"/>
-                        <a:ea typeface="Arial" charset="0"/>
-                        <a:cs typeface="Arial" charset="0"/>
+                        <a:latin typeface="Noto Sans JP" charset="0"/>
+                        <a:ea typeface="Noto Sans JP" charset="0"/>
+                        <a:cs typeface="Noto Sans JP" charset="0"/>
                       </a:endParaRPr>
                     </a:p>
                   </a:txBody>
@@ -8719,16 +8719,16 @@
                           <a:solidFill>
                             <a:srgbClr val="000000"/>
                           </a:solidFill>
-                          <a:latin typeface="Arial" pitchFamily="34" charset="0"/>
-                          <a:ea typeface="Arial" pitchFamily="34" charset="-122"/>
-                          <a:cs typeface="Arial" pitchFamily="34" charset="-120"/>
+                          <a:latin typeface="Noto Sans JP" pitchFamily="34" charset="0"/>
+                          <a:ea typeface="Noto Sans JP" pitchFamily="34" charset="-122"/>
+                          <a:cs typeface="Noto Sans JP" pitchFamily="34" charset="-120"/>
                         </a:rPr>
                         <a:t>2,400万円</a:t>
                       </a:r>
                       <a:endParaRPr lang="en-US" sz="1000" dirty="0">
-                        <a:latin typeface="Arial" charset="0"/>
-                        <a:ea typeface="Arial" charset="0"/>
-                        <a:cs typeface="Arial" charset="0"/>
+                        <a:latin typeface="Noto Sans JP" charset="0"/>
+                        <a:ea typeface="Noto Sans JP" charset="0"/>
+                        <a:cs typeface="Noto Sans JP" charset="0"/>
                       </a:endParaRPr>
                     </a:p>
                   </a:txBody>
@@ -8786,16 +8786,16 @@
                           <a:solidFill>
                             <a:srgbClr val="000000"/>
                           </a:solidFill>
-                          <a:latin typeface="Arial" pitchFamily="34" charset="0"/>
-                          <a:ea typeface="Arial" pitchFamily="34" charset="-122"/>
-                          <a:cs typeface="Arial" pitchFamily="34" charset="-120"/>
+                          <a:latin typeface="Noto Sans JP" pitchFamily="34" charset="0"/>
+                          <a:ea typeface="Noto Sans JP" pitchFamily="34" charset="-122"/>
+                          <a:cs typeface="Noto Sans JP" pitchFamily="34" charset="-120"/>
                         </a:rPr>
                         <a:t>月間コスト</a:t>
                       </a:r>
                       <a:endParaRPr lang="en-US" sz="1000" dirty="0">
-                        <a:latin typeface="Arial" charset="0"/>
-                        <a:ea typeface="Arial" charset="0"/>
-                        <a:cs typeface="Arial" charset="0"/>
+                        <a:latin typeface="Noto Sans JP" charset="0"/>
+                        <a:ea typeface="Noto Sans JP" charset="0"/>
+                        <a:cs typeface="Noto Sans JP" charset="0"/>
                       </a:endParaRPr>
                     </a:p>
                   </a:txBody>
@@ -8851,16 +8851,16 @@
                           <a:solidFill>
                             <a:srgbClr val="000000"/>
                           </a:solidFill>
-                          <a:latin typeface="Arial" pitchFamily="34" charset="0"/>
-                          <a:ea typeface="Arial" pitchFamily="34" charset="-122"/>
-                          <a:cs typeface="Arial" pitchFamily="34" charset="-120"/>
+                          <a:latin typeface="Noto Sans JP" pitchFamily="34" charset="0"/>
+                          <a:ea typeface="Noto Sans JP" pitchFamily="34" charset="-122"/>
+                          <a:cs typeface="Noto Sans JP" pitchFamily="34" charset="-120"/>
                         </a:rPr>
                         <a:t>20万円</a:t>
                       </a:r>
                       <a:endParaRPr lang="en-US" sz="1000" dirty="0">
-                        <a:latin typeface="Arial" charset="0"/>
-                        <a:ea typeface="Arial" charset="0"/>
-                        <a:cs typeface="Arial" charset="0"/>
+                        <a:latin typeface="Noto Sans JP" charset="0"/>
+                        <a:ea typeface="Noto Sans JP" charset="0"/>
+                        <a:cs typeface="Noto Sans JP" charset="0"/>
                       </a:endParaRPr>
                     </a:p>
                   </a:txBody>
@@ -8916,16 +8916,16 @@
                           <a:solidFill>
                             <a:srgbClr val="000000"/>
                           </a:solidFill>
-                          <a:latin typeface="Arial" pitchFamily="34" charset="0"/>
-                          <a:ea typeface="Arial" pitchFamily="34" charset="-122"/>
-                          <a:cs typeface="Arial" pitchFamily="34" charset="-120"/>
+                          <a:latin typeface="Noto Sans JP" pitchFamily="34" charset="0"/>
+                          <a:ea typeface="Noto Sans JP" pitchFamily="34" charset="-122"/>
+                          <a:cs typeface="Noto Sans JP" pitchFamily="34" charset="-120"/>
                         </a:rPr>
                         <a:t>150万円</a:t>
                       </a:r>
                       <a:endParaRPr lang="en-US" sz="1000" dirty="0">
-                        <a:latin typeface="Arial" charset="0"/>
-                        <a:ea typeface="Arial" charset="0"/>
-                        <a:cs typeface="Arial" charset="0"/>
+                        <a:latin typeface="Noto Sans JP" charset="0"/>
+                        <a:ea typeface="Noto Sans JP" charset="0"/>
+                        <a:cs typeface="Noto Sans JP" charset="0"/>
                       </a:endParaRPr>
                     </a:p>
                   </a:txBody>
@@ -8981,16 +8981,16 @@
                           <a:solidFill>
                             <a:srgbClr val="000000"/>
                           </a:solidFill>
-                          <a:latin typeface="Arial" pitchFamily="34" charset="0"/>
-                          <a:ea typeface="Arial" pitchFamily="34" charset="-122"/>
-                          <a:cs typeface="Arial" pitchFamily="34" charset="-120"/>
+                          <a:latin typeface="Noto Sans JP" pitchFamily="34" charset="0"/>
+                          <a:ea typeface="Noto Sans JP" pitchFamily="34" charset="-122"/>
+                          <a:cs typeface="Noto Sans JP" pitchFamily="34" charset="-120"/>
                         </a:rPr>
                         <a:t>500万円</a:t>
                       </a:r>
                       <a:endParaRPr lang="en-US" sz="1000" dirty="0">
-                        <a:latin typeface="Arial" charset="0"/>
-                        <a:ea typeface="Arial" charset="0"/>
-                        <a:cs typeface="Arial" charset="0"/>
+                        <a:latin typeface="Noto Sans JP" charset="0"/>
+                        <a:ea typeface="Noto Sans JP" charset="0"/>
+                        <a:cs typeface="Noto Sans JP" charset="0"/>
                       </a:endParaRPr>
                     </a:p>
                   </a:txBody>
@@ -9048,16 +9048,16 @@
                           <a:solidFill>
                             <a:srgbClr val="000000"/>
                           </a:solidFill>
-                          <a:latin typeface="Arial" pitchFamily="34" charset="0"/>
-                          <a:ea typeface="Arial" pitchFamily="34" charset="-122"/>
-                          <a:cs typeface="Arial" pitchFamily="34" charset="-120"/>
+                          <a:latin typeface="Noto Sans JP" pitchFamily="34" charset="0"/>
+                          <a:ea typeface="Noto Sans JP" pitchFamily="34" charset="-122"/>
+                          <a:cs typeface="Noto Sans JP" pitchFamily="34" charset="-120"/>
                         </a:rPr>
                         <a:t>営業利益</a:t>
                       </a:r>
                       <a:endParaRPr lang="en-US" sz="1000" dirty="0">
-                        <a:latin typeface="Arial" charset="0"/>
-                        <a:ea typeface="Arial" charset="0"/>
-                        <a:cs typeface="Arial" charset="0"/>
+                        <a:latin typeface="Noto Sans JP" charset="0"/>
+                        <a:ea typeface="Noto Sans JP" charset="0"/>
+                        <a:cs typeface="Noto Sans JP" charset="0"/>
                       </a:endParaRPr>
                     </a:p>
                   </a:txBody>
@@ -9113,16 +9113,16 @@
                           <a:solidFill>
                             <a:srgbClr val="000000"/>
                           </a:solidFill>
-                          <a:latin typeface="Arial" pitchFamily="34" charset="0"/>
-                          <a:ea typeface="Arial" pitchFamily="34" charset="-122"/>
-                          <a:cs typeface="Arial" pitchFamily="34" charset="-120"/>
+                          <a:latin typeface="Noto Sans JP" pitchFamily="34" charset="0"/>
+                          <a:ea typeface="Noto Sans JP" pitchFamily="34" charset="-122"/>
+                          <a:cs typeface="Noto Sans JP" pitchFamily="34" charset="-120"/>
                         </a:rPr>
                         <a:t>40万円</a:t>
                       </a:r>
                       <a:endParaRPr lang="en-US" sz="1000" dirty="0">
-                        <a:latin typeface="Arial" charset="0"/>
-                        <a:ea typeface="Arial" charset="0"/>
-                        <a:cs typeface="Arial" charset="0"/>
+                        <a:latin typeface="Noto Sans JP" charset="0"/>
+                        <a:ea typeface="Noto Sans JP" charset="0"/>
+                        <a:cs typeface="Noto Sans JP" charset="0"/>
                       </a:endParaRPr>
                     </a:p>
                   </a:txBody>
@@ -9178,16 +9178,16 @@
                           <a:solidFill>
                             <a:srgbClr val="000000"/>
                           </a:solidFill>
-                          <a:latin typeface="Arial" pitchFamily="34" charset="0"/>
-                          <a:ea typeface="Arial" pitchFamily="34" charset="-122"/>
-                          <a:cs typeface="Arial" pitchFamily="34" charset="-120"/>
+                          <a:latin typeface="Noto Sans JP" pitchFamily="34" charset="0"/>
+                          <a:ea typeface="Noto Sans JP" pitchFamily="34" charset="-122"/>
+                          <a:cs typeface="Noto Sans JP" pitchFamily="34" charset="-120"/>
                         </a:rPr>
                         <a:t>450万円</a:t>
                       </a:r>
                       <a:endParaRPr lang="en-US" sz="1000" dirty="0">
-                        <a:latin typeface="Arial" charset="0"/>
-                        <a:ea typeface="Arial" charset="0"/>
-                        <a:cs typeface="Arial" charset="0"/>
+                        <a:latin typeface="Noto Sans JP" charset="0"/>
+                        <a:ea typeface="Noto Sans JP" charset="0"/>
+                        <a:cs typeface="Noto Sans JP" charset="0"/>
                       </a:endParaRPr>
                     </a:p>
                   </a:txBody>
@@ -9243,16 +9243,16 @@
                           <a:solidFill>
                             <a:srgbClr val="000000"/>
                           </a:solidFill>
-                          <a:latin typeface="Arial" pitchFamily="34" charset="0"/>
-                          <a:ea typeface="Arial" pitchFamily="34" charset="-122"/>
-                          <a:cs typeface="Arial" pitchFamily="34" charset="-120"/>
+                          <a:latin typeface="Noto Sans JP" pitchFamily="34" charset="0"/>
+                          <a:ea typeface="Noto Sans JP" pitchFamily="34" charset="-122"/>
+                          <a:cs typeface="Noto Sans JP" pitchFamily="34" charset="-120"/>
                         </a:rPr>
                         <a:t>1,900万円</a:t>
                       </a:r>
                       <a:endParaRPr lang="en-US" sz="1000" dirty="0">
-                        <a:latin typeface="Arial" charset="0"/>
-                        <a:ea typeface="Arial" charset="0"/>
-                        <a:cs typeface="Arial" charset="0"/>
+                        <a:latin typeface="Noto Sans JP" charset="0"/>
+                        <a:ea typeface="Noto Sans JP" charset="0"/>
+                        <a:cs typeface="Noto Sans JP" charset="0"/>
                       </a:endParaRPr>
                     </a:p>
                   </a:txBody>
@@ -9329,9 +9329,9 @@
                 <a:solidFill>
                   <a:srgbClr val="A0A8B4"/>
                 </a:solidFill>
-                <a:latin typeface="Arial" pitchFamily="34" charset="0"/>
-                <a:ea typeface="Arial" pitchFamily="34" charset="-122"/>
-                <a:cs typeface="Arial" pitchFamily="34" charset="-120"/>
+                <a:latin typeface="Noto Sans JP" pitchFamily="34" charset="0"/>
+                <a:ea typeface="Noto Sans JP" pitchFamily="34" charset="-122"/>
+                <a:cs typeface="Noto Sans JP" pitchFamily="34" charset="-120"/>
               </a:rPr>
               <a:t>価格設定根拠: フリーランスの月額SaaS支出は62%が3,000円以下（フリマド2023）。人間VA月額5〜15万円との中間価格帯を狙う。初期ユーザーはβテスト→口コミ獲得を想定。</a:t>
             </a:r>
@@ -9400,9 +9400,9 @@
                 <a:solidFill>
                   <a:srgbClr val="1E2761"/>
                 </a:solidFill>
-                <a:latin typeface="Arial" pitchFamily="34" charset="0"/>
-                <a:ea typeface="Arial" pitchFamily="34" charset="-122"/>
-                <a:cs typeface="Arial" pitchFamily="34" charset="-120"/>
+                <a:latin typeface="Noto Sans JP" pitchFamily="34" charset="0"/>
+                <a:ea typeface="Noto Sans JP" pitchFamily="34" charset="-122"/>
+                <a:cs typeface="Noto Sans JP" pitchFamily="34" charset="-120"/>
               </a:rPr>
               <a:t>競合分析</a:t>
             </a:r>
@@ -9448,9 +9448,9 @@
                         <a:buNone/>
                       </a:pPr>
                       <a:endParaRPr lang="en-US" sz="1000" dirty="0">
-                        <a:latin typeface="Arial" charset="0"/>
-                        <a:ea typeface="Arial" charset="0"/>
-                        <a:cs typeface="Arial" charset="0"/>
+                        <a:latin typeface="Noto Sans JP" charset="0"/>
+                        <a:ea typeface="Noto Sans JP" charset="0"/>
+                        <a:cs typeface="Noto Sans JP" charset="0"/>
                       </a:endParaRPr>
                     </a:p>
                   </a:txBody>
@@ -9509,16 +9509,16 @@
                           <a:solidFill>
                             <a:srgbClr val="FFFFFF"/>
                           </a:solidFill>
-                          <a:latin typeface="Arial" pitchFamily="34" charset="0"/>
-                          <a:ea typeface="Arial" pitchFamily="34" charset="-122"/>
-                          <a:cs typeface="Arial" pitchFamily="34" charset="-120"/>
+                          <a:latin typeface="Noto Sans JP" pitchFamily="34" charset="0"/>
+                          <a:ea typeface="Noto Sans JP" pitchFamily="34" charset="-122"/>
+                          <a:cs typeface="Noto Sans JP" pitchFamily="34" charset="-120"/>
                         </a:rPr>
                         <a:t>人間VA</a:t>
                       </a:r>
                       <a:endParaRPr lang="en-US" sz="1000" dirty="0">
-                        <a:latin typeface="Arial" charset="0"/>
-                        <a:ea typeface="Arial" charset="0"/>
-                        <a:cs typeface="Arial" charset="0"/>
+                        <a:latin typeface="Noto Sans JP" charset="0"/>
+                        <a:ea typeface="Noto Sans JP" charset="0"/>
+                        <a:cs typeface="Noto Sans JP" charset="0"/>
                       </a:endParaRPr>
                     </a:p>
                     <a:p>
@@ -9530,16 +9530,16 @@
                           <a:solidFill>
                             <a:srgbClr val="FFFFFF"/>
                           </a:solidFill>
-                          <a:latin typeface="Arial" pitchFamily="34" charset="0"/>
-                          <a:ea typeface="Arial" pitchFamily="34" charset="-122"/>
-                          <a:cs typeface="Arial" pitchFamily="34" charset="-120"/>
+                          <a:latin typeface="Noto Sans JP" pitchFamily="34" charset="0"/>
+                          <a:ea typeface="Noto Sans JP" pitchFamily="34" charset="-122"/>
+                          <a:cs typeface="Noto Sans JP" pitchFamily="34" charset="-120"/>
                         </a:rPr>
                         <a:t>(フジ子さん等)</a:t>
                       </a:r>
                       <a:endParaRPr lang="en-US" sz="1000" dirty="0">
-                        <a:latin typeface="Arial" charset="0"/>
-                        <a:ea typeface="Arial" charset="0"/>
-                        <a:cs typeface="Arial" charset="0"/>
+                        <a:latin typeface="Noto Sans JP" charset="0"/>
+                        <a:ea typeface="Noto Sans JP" charset="0"/>
+                        <a:cs typeface="Noto Sans JP" charset="0"/>
                       </a:endParaRPr>
                     </a:p>
                   </a:txBody>
@@ -9598,16 +9598,16 @@
                           <a:solidFill>
                             <a:srgbClr val="FFFFFF"/>
                           </a:solidFill>
-                          <a:latin typeface="Arial" pitchFamily="34" charset="0"/>
-                          <a:ea typeface="Arial" pitchFamily="34" charset="-122"/>
-                          <a:cs typeface="Arial" pitchFamily="34" charset="-120"/>
+                          <a:latin typeface="Noto Sans JP" pitchFamily="34" charset="0"/>
+                          <a:ea typeface="Noto Sans JP" pitchFamily="34" charset="-122"/>
+                          <a:cs typeface="Noto Sans JP" pitchFamily="34" charset="-120"/>
                         </a:rPr>
                         <a:t>汎用AI</a:t>
                       </a:r>
                       <a:endParaRPr lang="en-US" sz="1000" dirty="0">
-                        <a:latin typeface="Arial" charset="0"/>
-                        <a:ea typeface="Arial" charset="0"/>
-                        <a:cs typeface="Arial" charset="0"/>
+                        <a:latin typeface="Noto Sans JP" charset="0"/>
+                        <a:ea typeface="Noto Sans JP" charset="0"/>
+                        <a:cs typeface="Noto Sans JP" charset="0"/>
                       </a:endParaRPr>
                     </a:p>
                     <a:p>
@@ -9619,16 +9619,16 @@
                           <a:solidFill>
                             <a:srgbClr val="FFFFFF"/>
                           </a:solidFill>
-                          <a:latin typeface="Arial" pitchFamily="34" charset="0"/>
-                          <a:ea typeface="Arial" pitchFamily="34" charset="-122"/>
-                          <a:cs typeface="Arial" pitchFamily="34" charset="-120"/>
+                          <a:latin typeface="Noto Sans JP" pitchFamily="34" charset="0"/>
+                          <a:ea typeface="Noto Sans JP" pitchFamily="34" charset="-122"/>
+                          <a:cs typeface="Noto Sans JP" pitchFamily="34" charset="-120"/>
                         </a:rPr>
                         <a:t>(ChatGPT等)</a:t>
                       </a:r>
                       <a:endParaRPr lang="en-US" sz="1000" dirty="0">
-                        <a:latin typeface="Arial" charset="0"/>
-                        <a:ea typeface="Arial" charset="0"/>
-                        <a:cs typeface="Arial" charset="0"/>
+                        <a:latin typeface="Noto Sans JP" charset="0"/>
+                        <a:ea typeface="Noto Sans JP" charset="0"/>
+                        <a:cs typeface="Noto Sans JP" charset="0"/>
                       </a:endParaRPr>
                     </a:p>
                   </a:txBody>
@@ -9687,16 +9687,16 @@
                           <a:solidFill>
                             <a:srgbClr val="FFFFFF"/>
                           </a:solidFill>
-                          <a:latin typeface="Arial" pitchFamily="34" charset="0"/>
-                          <a:ea typeface="Arial" pitchFamily="34" charset="-122"/>
-                          <a:cs typeface="Arial" pitchFamily="34" charset="-120"/>
+                          <a:latin typeface="Noto Sans JP" pitchFamily="34" charset="0"/>
+                          <a:ea typeface="Noto Sans JP" pitchFamily="34" charset="-122"/>
+                          <a:cs typeface="Noto Sans JP" pitchFamily="34" charset="-120"/>
                         </a:rPr>
                         <a:t>まるなげAI</a:t>
                       </a:r>
                       <a:endParaRPr lang="en-US" sz="1000" dirty="0">
-                        <a:latin typeface="Arial" charset="0"/>
-                        <a:ea typeface="Arial" charset="0"/>
-                        <a:cs typeface="Arial" charset="0"/>
+                        <a:latin typeface="Noto Sans JP" charset="0"/>
+                        <a:ea typeface="Noto Sans JP" charset="0"/>
+                        <a:cs typeface="Noto Sans JP" charset="0"/>
                       </a:endParaRPr>
                     </a:p>
                   </a:txBody>
@@ -9757,16 +9757,16 @@
                           <a:solidFill>
                             <a:srgbClr val="000000"/>
                           </a:solidFill>
-                          <a:latin typeface="Arial" pitchFamily="34" charset="0"/>
-                          <a:ea typeface="Arial" pitchFamily="34" charset="-122"/>
-                          <a:cs typeface="Arial" pitchFamily="34" charset="-120"/>
+                          <a:latin typeface="Noto Sans JP" pitchFamily="34" charset="0"/>
+                          <a:ea typeface="Noto Sans JP" pitchFamily="34" charset="-122"/>
+                          <a:cs typeface="Noto Sans JP" pitchFamily="34" charset="-120"/>
                         </a:rPr>
                         <a:t>月額コスト</a:t>
                       </a:r>
                       <a:endParaRPr lang="en-US" sz="1000" dirty="0">
-                        <a:latin typeface="Arial" charset="0"/>
-                        <a:ea typeface="Arial" charset="0"/>
-                        <a:cs typeface="Arial" charset="0"/>
+                        <a:latin typeface="Noto Sans JP" charset="0"/>
+                        <a:ea typeface="Noto Sans JP" charset="0"/>
+                        <a:cs typeface="Noto Sans JP" charset="0"/>
                       </a:endParaRPr>
                     </a:p>
                   </a:txBody>
@@ -9822,16 +9822,16 @@
                           <a:solidFill>
                             <a:srgbClr val="000000"/>
                           </a:solidFill>
-                          <a:latin typeface="Arial" pitchFamily="34" charset="0"/>
-                          <a:ea typeface="Arial" pitchFamily="34" charset="-122"/>
-                          <a:cs typeface="Arial" pitchFamily="34" charset="-120"/>
+                          <a:latin typeface="Noto Sans JP" pitchFamily="34" charset="0"/>
+                          <a:ea typeface="Noto Sans JP" pitchFamily="34" charset="-122"/>
+                          <a:cs typeface="Noto Sans JP" pitchFamily="34" charset="-120"/>
                         </a:rPr>
                         <a:t>6.3〜13.2万円</a:t>
                       </a:r>
                       <a:endParaRPr lang="en-US" sz="1000" dirty="0">
-                        <a:latin typeface="Arial" charset="0"/>
-                        <a:ea typeface="Arial" charset="0"/>
-                        <a:cs typeface="Arial" charset="0"/>
+                        <a:latin typeface="Noto Sans JP" charset="0"/>
+                        <a:ea typeface="Noto Sans JP" charset="0"/>
+                        <a:cs typeface="Noto Sans JP" charset="0"/>
                       </a:endParaRPr>
                     </a:p>
                   </a:txBody>
@@ -9887,16 +9887,16 @@
                           <a:solidFill>
                             <a:srgbClr val="000000"/>
                           </a:solidFill>
-                          <a:latin typeface="Arial" pitchFamily="34" charset="0"/>
-                          <a:ea typeface="Arial" pitchFamily="34" charset="-122"/>
-                          <a:cs typeface="Arial" pitchFamily="34" charset="-120"/>
+                          <a:latin typeface="Noto Sans JP" pitchFamily="34" charset="0"/>
+                          <a:ea typeface="Noto Sans JP" pitchFamily="34" charset="-122"/>
+                          <a:cs typeface="Noto Sans JP" pitchFamily="34" charset="-120"/>
                         </a:rPr>
                         <a:t>約3,000円〜</a:t>
                       </a:r>
                       <a:endParaRPr lang="en-US" sz="1000" dirty="0">
-                        <a:latin typeface="Arial" charset="0"/>
-                        <a:ea typeface="Arial" charset="0"/>
-                        <a:cs typeface="Arial" charset="0"/>
+                        <a:latin typeface="Noto Sans JP" charset="0"/>
+                        <a:ea typeface="Noto Sans JP" charset="0"/>
+                        <a:cs typeface="Noto Sans JP" charset="0"/>
                       </a:endParaRPr>
                     </a:p>
                   </a:txBody>
@@ -9952,16 +9952,16 @@
                           <a:solidFill>
                             <a:srgbClr val="000000"/>
                           </a:solidFill>
-                          <a:latin typeface="Arial" pitchFamily="34" charset="0"/>
-                          <a:ea typeface="Arial" pitchFamily="34" charset="-122"/>
-                          <a:cs typeface="Arial" pitchFamily="34" charset="-120"/>
+                          <a:latin typeface="Noto Sans JP" pitchFamily="34" charset="0"/>
+                          <a:ea typeface="Noto Sans JP" pitchFamily="34" charset="-122"/>
+                          <a:cs typeface="Noto Sans JP" pitchFamily="34" charset="-120"/>
                         </a:rPr>
                         <a:t>9,800円〜</a:t>
                       </a:r>
                       <a:endParaRPr lang="en-US" sz="1000" dirty="0">
-                        <a:latin typeface="Arial" charset="0"/>
-                        <a:ea typeface="Arial" charset="0"/>
-                        <a:cs typeface="Arial" charset="0"/>
+                        <a:latin typeface="Noto Sans JP" charset="0"/>
+                        <a:ea typeface="Noto Sans JP" charset="0"/>
+                        <a:cs typeface="Noto Sans JP" charset="0"/>
                       </a:endParaRPr>
                     </a:p>
                   </a:txBody>
@@ -10019,16 +10019,16 @@
                           <a:solidFill>
                             <a:srgbClr val="000000"/>
                           </a:solidFill>
-                          <a:latin typeface="Arial" pitchFamily="34" charset="0"/>
-                          <a:ea typeface="Arial" pitchFamily="34" charset="-122"/>
-                          <a:cs typeface="Arial" pitchFamily="34" charset="-120"/>
+                          <a:latin typeface="Noto Sans JP" pitchFamily="34" charset="0"/>
+                          <a:ea typeface="Noto Sans JP" pitchFamily="34" charset="-122"/>
+                          <a:cs typeface="Noto Sans JP" pitchFamily="34" charset="-120"/>
                         </a:rPr>
                         <a:t>業務実行</a:t>
                       </a:r>
                       <a:endParaRPr lang="en-US" sz="1000" dirty="0">
-                        <a:latin typeface="Arial" charset="0"/>
-                        <a:ea typeface="Arial" charset="0"/>
-                        <a:cs typeface="Arial" charset="0"/>
+                        <a:latin typeface="Noto Sans JP" charset="0"/>
+                        <a:ea typeface="Noto Sans JP" charset="0"/>
+                        <a:cs typeface="Noto Sans JP" charset="0"/>
                       </a:endParaRPr>
                     </a:p>
                   </a:txBody>
@@ -10084,16 +10084,16 @@
                           <a:solidFill>
                             <a:srgbClr val="000000"/>
                           </a:solidFill>
-                          <a:latin typeface="Arial" pitchFamily="34" charset="0"/>
-                          <a:ea typeface="Arial" pitchFamily="34" charset="-122"/>
-                          <a:cs typeface="Arial" pitchFamily="34" charset="-120"/>
+                          <a:latin typeface="Noto Sans JP" pitchFamily="34" charset="0"/>
+                          <a:ea typeface="Noto Sans JP" pitchFamily="34" charset="-122"/>
+                          <a:cs typeface="Noto Sans JP" pitchFamily="34" charset="-120"/>
                         </a:rPr>
                         <a:t>○ 人が対応</a:t>
                       </a:r>
                       <a:endParaRPr lang="en-US" sz="1000" dirty="0">
-                        <a:latin typeface="Arial" charset="0"/>
-                        <a:ea typeface="Arial" charset="0"/>
-                        <a:cs typeface="Arial" charset="0"/>
+                        <a:latin typeface="Noto Sans JP" charset="0"/>
+                        <a:ea typeface="Noto Sans JP" charset="0"/>
+                        <a:cs typeface="Noto Sans JP" charset="0"/>
                       </a:endParaRPr>
                     </a:p>
                   </a:txBody>
@@ -10149,16 +10149,16 @@
                           <a:solidFill>
                             <a:srgbClr val="000000"/>
                           </a:solidFill>
-                          <a:latin typeface="Arial" pitchFamily="34" charset="0"/>
-                          <a:ea typeface="Arial" pitchFamily="34" charset="-122"/>
-                          <a:cs typeface="Arial" pitchFamily="34" charset="-120"/>
+                          <a:latin typeface="Noto Sans JP" pitchFamily="34" charset="0"/>
+                          <a:ea typeface="Noto Sans JP" pitchFamily="34" charset="-122"/>
+                          <a:cs typeface="Noto Sans JP" pitchFamily="34" charset="-120"/>
                         </a:rPr>
                         <a:t>× 提案のみ</a:t>
                       </a:r>
                       <a:endParaRPr lang="en-US" sz="1000" dirty="0">
-                        <a:latin typeface="Arial" charset="0"/>
-                        <a:ea typeface="Arial" charset="0"/>
-                        <a:cs typeface="Arial" charset="0"/>
+                        <a:latin typeface="Noto Sans JP" charset="0"/>
+                        <a:ea typeface="Noto Sans JP" charset="0"/>
+                        <a:cs typeface="Noto Sans JP" charset="0"/>
                       </a:endParaRPr>
                     </a:p>
                   </a:txBody>
@@ -10214,16 +10214,16 @@
                           <a:solidFill>
                             <a:srgbClr val="000000"/>
                           </a:solidFill>
-                          <a:latin typeface="Arial" pitchFamily="34" charset="0"/>
-                          <a:ea typeface="Arial" pitchFamily="34" charset="-122"/>
-                          <a:cs typeface="Arial" pitchFamily="34" charset="-120"/>
+                          <a:latin typeface="Noto Sans JP" pitchFamily="34" charset="0"/>
+                          <a:ea typeface="Noto Sans JP" pitchFamily="34" charset="-122"/>
+                          <a:cs typeface="Noto Sans JP" pitchFamily="34" charset="-120"/>
                         </a:rPr>
                         <a:t>○ 自動実行</a:t>
                       </a:r>
                       <a:endParaRPr lang="en-US" sz="1000" dirty="0">
-                        <a:latin typeface="Arial" charset="0"/>
-                        <a:ea typeface="Arial" charset="0"/>
-                        <a:cs typeface="Arial" charset="0"/>
+                        <a:latin typeface="Noto Sans JP" charset="0"/>
+                        <a:ea typeface="Noto Sans JP" charset="0"/>
+                        <a:cs typeface="Noto Sans JP" charset="0"/>
                       </a:endParaRPr>
                     </a:p>
                   </a:txBody>
@@ -10281,16 +10281,16 @@
                           <a:solidFill>
                             <a:srgbClr val="000000"/>
                           </a:solidFill>
-                          <a:latin typeface="Arial" pitchFamily="34" charset="0"/>
-                          <a:ea typeface="Arial" pitchFamily="34" charset="-122"/>
-                          <a:cs typeface="Arial" pitchFamily="34" charset="-120"/>
+                          <a:latin typeface="Noto Sans JP" pitchFamily="34" charset="0"/>
+                          <a:ea typeface="Noto Sans JP" pitchFamily="34" charset="-122"/>
+                          <a:cs typeface="Noto Sans JP" pitchFamily="34" charset="-120"/>
                         </a:rPr>
                         <a:t>24時間対応</a:t>
                       </a:r>
                       <a:endParaRPr lang="en-US" sz="1000" dirty="0">
-                        <a:latin typeface="Arial" charset="0"/>
-                        <a:ea typeface="Arial" charset="0"/>
-                        <a:cs typeface="Arial" charset="0"/>
+                        <a:latin typeface="Noto Sans JP" charset="0"/>
+                        <a:ea typeface="Noto Sans JP" charset="0"/>
+                        <a:cs typeface="Noto Sans JP" charset="0"/>
                       </a:endParaRPr>
                     </a:p>
                   </a:txBody>
@@ -10346,16 +10346,16 @@
                           <a:solidFill>
                             <a:srgbClr val="000000"/>
                           </a:solidFill>
-                          <a:latin typeface="Arial" pitchFamily="34" charset="0"/>
-                          <a:ea typeface="Arial" pitchFamily="34" charset="-122"/>
-                          <a:cs typeface="Arial" pitchFamily="34" charset="-120"/>
+                          <a:latin typeface="Noto Sans JP" pitchFamily="34" charset="0"/>
+                          <a:ea typeface="Noto Sans JP" pitchFamily="34" charset="-122"/>
+                          <a:cs typeface="Noto Sans JP" pitchFamily="34" charset="-120"/>
                         </a:rPr>
                         <a:t>× 稼働時間限定</a:t>
                       </a:r>
                       <a:endParaRPr lang="en-US" sz="1000" dirty="0">
-                        <a:latin typeface="Arial" charset="0"/>
-                        <a:ea typeface="Arial" charset="0"/>
-                        <a:cs typeface="Arial" charset="0"/>
+                        <a:latin typeface="Noto Sans JP" charset="0"/>
+                        <a:ea typeface="Noto Sans JP" charset="0"/>
+                        <a:cs typeface="Noto Sans JP" charset="0"/>
                       </a:endParaRPr>
                     </a:p>
                   </a:txBody>
@@ -10411,16 +10411,16 @@
                           <a:solidFill>
                             <a:srgbClr val="000000"/>
                           </a:solidFill>
-                          <a:latin typeface="Arial" pitchFamily="34" charset="0"/>
-                          <a:ea typeface="Arial" pitchFamily="34" charset="-122"/>
-                          <a:cs typeface="Arial" pitchFamily="34" charset="-120"/>
+                          <a:latin typeface="Noto Sans JP" pitchFamily="34" charset="0"/>
+                          <a:ea typeface="Noto Sans JP" pitchFamily="34" charset="-122"/>
+                          <a:cs typeface="Noto Sans JP" pitchFamily="34" charset="-120"/>
                         </a:rPr>
                         <a:t>○</a:t>
                       </a:r>
                       <a:endParaRPr lang="en-US" sz="1000" dirty="0">
-                        <a:latin typeface="Arial" charset="0"/>
-                        <a:ea typeface="Arial" charset="0"/>
-                        <a:cs typeface="Arial" charset="0"/>
+                        <a:latin typeface="Noto Sans JP" charset="0"/>
+                        <a:ea typeface="Noto Sans JP" charset="0"/>
+                        <a:cs typeface="Noto Sans JP" charset="0"/>
                       </a:endParaRPr>
                     </a:p>
                   </a:txBody>
@@ -10476,16 +10476,16 @@
                           <a:solidFill>
                             <a:srgbClr val="000000"/>
                           </a:solidFill>
-                          <a:latin typeface="Arial" pitchFamily="34" charset="0"/>
-                          <a:ea typeface="Arial" pitchFamily="34" charset="-122"/>
-                          <a:cs typeface="Arial" pitchFamily="34" charset="-120"/>
+                          <a:latin typeface="Noto Sans JP" pitchFamily="34" charset="0"/>
+                          <a:ea typeface="Noto Sans JP" pitchFamily="34" charset="-122"/>
+                          <a:cs typeface="Noto Sans JP" pitchFamily="34" charset="-120"/>
                         </a:rPr>
                         <a:t>○</a:t>
                       </a:r>
                       <a:endParaRPr lang="en-US" sz="1000" dirty="0">
-                        <a:latin typeface="Arial" charset="0"/>
-                        <a:ea typeface="Arial" charset="0"/>
-                        <a:cs typeface="Arial" charset="0"/>
+                        <a:latin typeface="Noto Sans JP" charset="0"/>
+                        <a:ea typeface="Noto Sans JP" charset="0"/>
+                        <a:cs typeface="Noto Sans JP" charset="0"/>
                       </a:endParaRPr>
                     </a:p>
                   </a:txBody>
@@ -10543,16 +10543,16 @@
                           <a:solidFill>
                             <a:srgbClr val="000000"/>
                           </a:solidFill>
-                          <a:latin typeface="Arial" pitchFamily="34" charset="0"/>
-                          <a:ea typeface="Arial" pitchFamily="34" charset="-122"/>
-                          <a:cs typeface="Arial" pitchFamily="34" charset="-120"/>
+                          <a:latin typeface="Noto Sans JP" pitchFamily="34" charset="0"/>
+                          <a:ea typeface="Noto Sans JP" pitchFamily="34" charset="-122"/>
+                          <a:cs typeface="Noto Sans JP" pitchFamily="34" charset="-120"/>
                         </a:rPr>
                         <a:t>SNS投稿</a:t>
                       </a:r>
                       <a:endParaRPr lang="en-US" sz="1000" dirty="0">
-                        <a:latin typeface="Arial" charset="0"/>
-                        <a:ea typeface="Arial" charset="0"/>
-                        <a:cs typeface="Arial" charset="0"/>
+                        <a:latin typeface="Noto Sans JP" charset="0"/>
+                        <a:ea typeface="Noto Sans JP" charset="0"/>
+                        <a:cs typeface="Noto Sans JP" charset="0"/>
                       </a:endParaRPr>
                     </a:p>
                   </a:txBody>
@@ -10608,16 +10608,16 @@
                           <a:solidFill>
                             <a:srgbClr val="000000"/>
                           </a:solidFill>
-                          <a:latin typeface="Arial" pitchFamily="34" charset="0"/>
-                          <a:ea typeface="Arial" pitchFamily="34" charset="-122"/>
-                          <a:cs typeface="Arial" pitchFamily="34" charset="-120"/>
+                          <a:latin typeface="Noto Sans JP" pitchFamily="34" charset="0"/>
+                          <a:ea typeface="Noto Sans JP" pitchFamily="34" charset="-122"/>
+                          <a:cs typeface="Noto Sans JP" pitchFamily="34" charset="-120"/>
                         </a:rPr>
                         <a:t>△ 手動依頼</a:t>
                       </a:r>
                       <a:endParaRPr lang="en-US" sz="1000" dirty="0">
-                        <a:latin typeface="Arial" charset="0"/>
-                        <a:ea typeface="Arial" charset="0"/>
-                        <a:cs typeface="Arial" charset="0"/>
+                        <a:latin typeface="Noto Sans JP" charset="0"/>
+                        <a:ea typeface="Noto Sans JP" charset="0"/>
+                        <a:cs typeface="Noto Sans JP" charset="0"/>
                       </a:endParaRPr>
                     </a:p>
                   </a:txBody>
@@ -10673,16 +10673,16 @@
                           <a:solidFill>
                             <a:srgbClr val="000000"/>
                           </a:solidFill>
-                          <a:latin typeface="Arial" pitchFamily="34" charset="0"/>
-                          <a:ea typeface="Arial" pitchFamily="34" charset="-122"/>
-                          <a:cs typeface="Arial" pitchFamily="34" charset="-120"/>
+                          <a:latin typeface="Noto Sans JP" pitchFamily="34" charset="0"/>
+                          <a:ea typeface="Noto Sans JP" pitchFamily="34" charset="-122"/>
+                          <a:cs typeface="Noto Sans JP" pitchFamily="34" charset="-120"/>
                         </a:rPr>
                         <a:t>× 投稿不可</a:t>
                       </a:r>
                       <a:endParaRPr lang="en-US" sz="1000" dirty="0">
-                        <a:latin typeface="Arial" charset="0"/>
-                        <a:ea typeface="Arial" charset="0"/>
-                        <a:cs typeface="Arial" charset="0"/>
+                        <a:latin typeface="Noto Sans JP" charset="0"/>
+                        <a:ea typeface="Noto Sans JP" charset="0"/>
+                        <a:cs typeface="Noto Sans JP" charset="0"/>
                       </a:endParaRPr>
                     </a:p>
                   </a:txBody>
@@ -10738,16 +10738,16 @@
                           <a:solidFill>
                             <a:srgbClr val="000000"/>
                           </a:solidFill>
-                          <a:latin typeface="Arial" pitchFamily="34" charset="0"/>
-                          <a:ea typeface="Arial" pitchFamily="34" charset="-122"/>
-                          <a:cs typeface="Arial" pitchFamily="34" charset="-120"/>
+                          <a:latin typeface="Noto Sans JP" pitchFamily="34" charset="0"/>
+                          <a:ea typeface="Noto Sans JP" pitchFamily="34" charset="-122"/>
+                          <a:cs typeface="Noto Sans JP" pitchFamily="34" charset="-120"/>
                         </a:rPr>
                         <a:t>○ 自動投稿</a:t>
                       </a:r>
                       <a:endParaRPr lang="en-US" sz="1000" dirty="0">
-                        <a:latin typeface="Arial" charset="0"/>
-                        <a:ea typeface="Arial" charset="0"/>
-                        <a:cs typeface="Arial" charset="0"/>
+                        <a:latin typeface="Noto Sans JP" charset="0"/>
+                        <a:ea typeface="Noto Sans JP" charset="0"/>
+                        <a:cs typeface="Noto Sans JP" charset="0"/>
                       </a:endParaRPr>
                     </a:p>
                   </a:txBody>
@@ -10805,16 +10805,16 @@
                           <a:solidFill>
                             <a:srgbClr val="000000"/>
                           </a:solidFill>
-                          <a:latin typeface="Arial" pitchFamily="34" charset="0"/>
-                          <a:ea typeface="Arial" pitchFamily="34" charset="-122"/>
-                          <a:cs typeface="Arial" pitchFamily="34" charset="-120"/>
+                          <a:latin typeface="Noto Sans JP" pitchFamily="34" charset="0"/>
+                          <a:ea typeface="Noto Sans JP" pitchFamily="34" charset="-122"/>
+                          <a:cs typeface="Noto Sans JP" pitchFamily="34" charset="-120"/>
                         </a:rPr>
                         <a:t>カレンダー連携</a:t>
                       </a:r>
                       <a:endParaRPr lang="en-US" sz="1000" dirty="0">
-                        <a:latin typeface="Arial" charset="0"/>
-                        <a:ea typeface="Arial" charset="0"/>
-                        <a:cs typeface="Arial" charset="0"/>
+                        <a:latin typeface="Noto Sans JP" charset="0"/>
+                        <a:ea typeface="Noto Sans JP" charset="0"/>
+                        <a:cs typeface="Noto Sans JP" charset="0"/>
                       </a:endParaRPr>
                     </a:p>
                   </a:txBody>
@@ -10870,16 +10870,16 @@
                           <a:solidFill>
                             <a:srgbClr val="000000"/>
                           </a:solidFill>
-                          <a:latin typeface="Arial" pitchFamily="34" charset="0"/>
-                          <a:ea typeface="Arial" pitchFamily="34" charset="-122"/>
-                          <a:cs typeface="Arial" pitchFamily="34" charset="-120"/>
+                          <a:latin typeface="Noto Sans JP" pitchFamily="34" charset="0"/>
+                          <a:ea typeface="Noto Sans JP" pitchFamily="34" charset="-122"/>
+                          <a:cs typeface="Noto Sans JP" pitchFamily="34" charset="-120"/>
                         </a:rPr>
                         <a:t>○</a:t>
                       </a:r>
                       <a:endParaRPr lang="en-US" sz="1000" dirty="0">
-                        <a:latin typeface="Arial" charset="0"/>
-                        <a:ea typeface="Arial" charset="0"/>
-                        <a:cs typeface="Arial" charset="0"/>
+                        <a:latin typeface="Noto Sans JP" charset="0"/>
+                        <a:ea typeface="Noto Sans JP" charset="0"/>
+                        <a:cs typeface="Noto Sans JP" charset="0"/>
                       </a:endParaRPr>
                     </a:p>
                   </a:txBody>
@@ -10935,16 +10935,16 @@
                           <a:solidFill>
                             <a:srgbClr val="000000"/>
                           </a:solidFill>
-                          <a:latin typeface="Arial" pitchFamily="34" charset="0"/>
-                          <a:ea typeface="Arial" pitchFamily="34" charset="-122"/>
-                          <a:cs typeface="Arial" pitchFamily="34" charset="-120"/>
+                          <a:latin typeface="Noto Sans JP" pitchFamily="34" charset="0"/>
+                          <a:ea typeface="Noto Sans JP" pitchFamily="34" charset="-122"/>
+                          <a:cs typeface="Noto Sans JP" pitchFamily="34" charset="-120"/>
                         </a:rPr>
                         <a:t>△ 手動コピペ</a:t>
                       </a:r>
                       <a:endParaRPr lang="en-US" sz="1000" dirty="0">
-                        <a:latin typeface="Arial" charset="0"/>
-                        <a:ea typeface="Arial" charset="0"/>
-                        <a:cs typeface="Arial" charset="0"/>
+                        <a:latin typeface="Noto Sans JP" charset="0"/>
+                        <a:ea typeface="Noto Sans JP" charset="0"/>
+                        <a:cs typeface="Noto Sans JP" charset="0"/>
                       </a:endParaRPr>
                     </a:p>
                   </a:txBody>
@@ -11000,16 +11000,16 @@
                           <a:solidFill>
                             <a:srgbClr val="000000"/>
                           </a:solidFill>
-                          <a:latin typeface="Arial" pitchFamily="34" charset="0"/>
-                          <a:ea typeface="Arial" pitchFamily="34" charset="-122"/>
-                          <a:cs typeface="Arial" pitchFamily="34" charset="-120"/>
+                          <a:latin typeface="Noto Sans JP" pitchFamily="34" charset="0"/>
+                          <a:ea typeface="Noto Sans JP" pitchFamily="34" charset="-122"/>
+                          <a:cs typeface="Noto Sans JP" pitchFamily="34" charset="-120"/>
                         </a:rPr>
                         <a:t>○ 双方向</a:t>
                       </a:r>
                       <a:endParaRPr lang="en-US" sz="1000" dirty="0">
-                        <a:latin typeface="Arial" charset="0"/>
-                        <a:ea typeface="Arial" charset="0"/>
-                        <a:cs typeface="Arial" charset="0"/>
+                        <a:latin typeface="Noto Sans JP" charset="0"/>
+                        <a:ea typeface="Noto Sans JP" charset="0"/>
+                        <a:cs typeface="Noto Sans JP" charset="0"/>
                       </a:endParaRPr>
                     </a:p>
                   </a:txBody>
@@ -11067,16 +11067,16 @@
                           <a:solidFill>
                             <a:srgbClr val="000000"/>
                           </a:solidFill>
-                          <a:latin typeface="Arial" pitchFamily="34" charset="0"/>
-                          <a:ea typeface="Arial" pitchFamily="34" charset="-122"/>
-                          <a:cs typeface="Arial" pitchFamily="34" charset="-120"/>
+                          <a:latin typeface="Noto Sans JP" pitchFamily="34" charset="0"/>
+                          <a:ea typeface="Noto Sans JP" pitchFamily="34" charset="-122"/>
+                          <a:cs typeface="Noto Sans JP" pitchFamily="34" charset="-120"/>
                         </a:rPr>
                         <a:t>導入の手軽さ</a:t>
                       </a:r>
                       <a:endParaRPr lang="en-US" sz="1000" dirty="0">
-                        <a:latin typeface="Arial" charset="0"/>
-                        <a:ea typeface="Arial" charset="0"/>
-                        <a:cs typeface="Arial" charset="0"/>
+                        <a:latin typeface="Noto Sans JP" charset="0"/>
+                        <a:ea typeface="Noto Sans JP" charset="0"/>
+                        <a:cs typeface="Noto Sans JP" charset="0"/>
                       </a:endParaRPr>
                     </a:p>
                   </a:txBody>
@@ -11132,16 +11132,16 @@
                           <a:solidFill>
                             <a:srgbClr val="000000"/>
                           </a:solidFill>
-                          <a:latin typeface="Arial" pitchFamily="34" charset="0"/>
-                          <a:ea typeface="Arial" pitchFamily="34" charset="-122"/>
-                          <a:cs typeface="Arial" pitchFamily="34" charset="-120"/>
+                          <a:latin typeface="Noto Sans JP" pitchFamily="34" charset="0"/>
+                          <a:ea typeface="Noto Sans JP" pitchFamily="34" charset="-122"/>
+                          <a:cs typeface="Noto Sans JP" pitchFamily="34" charset="-120"/>
                         </a:rPr>
                         <a:t>× 面接・契約</a:t>
                       </a:r>
                       <a:endParaRPr lang="en-US" sz="1000" dirty="0">
-                        <a:latin typeface="Arial" charset="0"/>
-                        <a:ea typeface="Arial" charset="0"/>
-                        <a:cs typeface="Arial" charset="0"/>
+                        <a:latin typeface="Noto Sans JP" charset="0"/>
+                        <a:ea typeface="Noto Sans JP" charset="0"/>
+                        <a:cs typeface="Noto Sans JP" charset="0"/>
                       </a:endParaRPr>
                     </a:p>
                   </a:txBody>
@@ -11197,16 +11197,16 @@
                           <a:solidFill>
                             <a:srgbClr val="000000"/>
                           </a:solidFill>
-                          <a:latin typeface="Arial" pitchFamily="34" charset="0"/>
-                          <a:ea typeface="Arial" pitchFamily="34" charset="-122"/>
-                          <a:cs typeface="Arial" pitchFamily="34" charset="-120"/>
+                          <a:latin typeface="Noto Sans JP" pitchFamily="34" charset="0"/>
+                          <a:ea typeface="Noto Sans JP" pitchFamily="34" charset="-122"/>
+                          <a:cs typeface="Noto Sans JP" pitchFamily="34" charset="-120"/>
                         </a:rPr>
                         <a:t>○ 即利用</a:t>
                       </a:r>
                       <a:endParaRPr lang="en-US" sz="1000" dirty="0">
-                        <a:latin typeface="Arial" charset="0"/>
-                        <a:ea typeface="Arial" charset="0"/>
-                        <a:cs typeface="Arial" charset="0"/>
+                        <a:latin typeface="Noto Sans JP" charset="0"/>
+                        <a:ea typeface="Noto Sans JP" charset="0"/>
+                        <a:cs typeface="Noto Sans JP" charset="0"/>
                       </a:endParaRPr>
                     </a:p>
                   </a:txBody>
@@ -11262,16 +11262,16 @@
                           <a:solidFill>
                             <a:srgbClr val="000000"/>
                           </a:solidFill>
-                          <a:latin typeface="Arial" pitchFamily="34" charset="0"/>
-                          <a:ea typeface="Arial" pitchFamily="34" charset="-122"/>
-                          <a:cs typeface="Arial" pitchFamily="34" charset="-120"/>
+                          <a:latin typeface="Noto Sans JP" pitchFamily="34" charset="0"/>
+                          <a:ea typeface="Noto Sans JP" pitchFamily="34" charset="-122"/>
+                          <a:cs typeface="Noto Sans JP" pitchFamily="34" charset="-120"/>
                         </a:rPr>
                         <a:t>○ LINE追加のみ</a:t>
                       </a:r>
                       <a:endParaRPr lang="en-US" sz="1000" dirty="0">
-                        <a:latin typeface="Arial" charset="0"/>
-                        <a:ea typeface="Arial" charset="0"/>
-                        <a:cs typeface="Arial" charset="0"/>
+                        <a:latin typeface="Noto Sans JP" charset="0"/>
+                        <a:ea typeface="Noto Sans JP" charset="0"/>
+                        <a:cs typeface="Noto Sans JP" charset="0"/>
                       </a:endParaRPr>
                     </a:p>
                   </a:txBody>
@@ -11329,16 +11329,16 @@
                           <a:solidFill>
                             <a:srgbClr val="000000"/>
                           </a:solidFill>
-                          <a:latin typeface="Arial" pitchFamily="34" charset="0"/>
-                          <a:ea typeface="Arial" pitchFamily="34" charset="-122"/>
-                          <a:cs typeface="Arial" pitchFamily="34" charset="-120"/>
+                          <a:latin typeface="Noto Sans JP" pitchFamily="34" charset="0"/>
+                          <a:ea typeface="Noto Sans JP" pitchFamily="34" charset="-122"/>
+                          <a:cs typeface="Noto Sans JP" pitchFamily="34" charset="-120"/>
                         </a:rPr>
                         <a:t>品質の安定性</a:t>
                       </a:r>
                       <a:endParaRPr lang="en-US" sz="1000" dirty="0">
-                        <a:latin typeface="Arial" charset="0"/>
-                        <a:ea typeface="Arial" charset="0"/>
-                        <a:cs typeface="Arial" charset="0"/>
+                        <a:latin typeface="Noto Sans JP" charset="0"/>
+                        <a:ea typeface="Noto Sans JP" charset="0"/>
+                        <a:cs typeface="Noto Sans JP" charset="0"/>
                       </a:endParaRPr>
                     </a:p>
                   </a:txBody>
@@ -11394,16 +11394,16 @@
                           <a:solidFill>
                             <a:srgbClr val="000000"/>
                           </a:solidFill>
-                          <a:latin typeface="Arial" pitchFamily="34" charset="0"/>
-                          <a:ea typeface="Arial" pitchFamily="34" charset="-122"/>
-                          <a:cs typeface="Arial" pitchFamily="34" charset="-120"/>
+                          <a:latin typeface="Noto Sans JP" pitchFamily="34" charset="0"/>
+                          <a:ea typeface="Noto Sans JP" pitchFamily="34" charset="-122"/>
+                          <a:cs typeface="Noto Sans JP" pitchFamily="34" charset="-120"/>
                         </a:rPr>
                         <a:t>△ 人による</a:t>
                       </a:r>
                       <a:endParaRPr lang="en-US" sz="1000" dirty="0">
-                        <a:latin typeface="Arial" charset="0"/>
-                        <a:ea typeface="Arial" charset="0"/>
-                        <a:cs typeface="Arial" charset="0"/>
+                        <a:latin typeface="Noto Sans JP" charset="0"/>
+                        <a:ea typeface="Noto Sans JP" charset="0"/>
+                        <a:cs typeface="Noto Sans JP" charset="0"/>
                       </a:endParaRPr>
                     </a:p>
                   </a:txBody>
@@ -11459,16 +11459,16 @@
                           <a:solidFill>
                             <a:srgbClr val="000000"/>
                           </a:solidFill>
-                          <a:latin typeface="Arial" pitchFamily="34" charset="0"/>
-                          <a:ea typeface="Arial" pitchFamily="34" charset="-122"/>
-                          <a:cs typeface="Arial" pitchFamily="34" charset="-120"/>
+                          <a:latin typeface="Noto Sans JP" pitchFamily="34" charset="0"/>
+                          <a:ea typeface="Noto Sans JP" pitchFamily="34" charset="-122"/>
+                          <a:cs typeface="Noto Sans JP" pitchFamily="34" charset="-120"/>
                         </a:rPr>
                         <a:t>○ 安定</a:t>
                       </a:r>
                       <a:endParaRPr lang="en-US" sz="1000" dirty="0">
-                        <a:latin typeface="Arial" charset="0"/>
-                        <a:ea typeface="Arial" charset="0"/>
-                        <a:cs typeface="Arial" charset="0"/>
+                        <a:latin typeface="Noto Sans JP" charset="0"/>
+                        <a:ea typeface="Noto Sans JP" charset="0"/>
+                        <a:cs typeface="Noto Sans JP" charset="0"/>
                       </a:endParaRPr>
                     </a:p>
                   </a:txBody>
@@ -11524,16 +11524,16 @@
                           <a:solidFill>
                             <a:srgbClr val="000000"/>
                           </a:solidFill>
-                          <a:latin typeface="Arial" pitchFamily="34" charset="0"/>
-                          <a:ea typeface="Arial" pitchFamily="34" charset="-122"/>
-                          <a:cs typeface="Arial" pitchFamily="34" charset="-120"/>
+                          <a:latin typeface="Noto Sans JP" pitchFamily="34" charset="0"/>
+                          <a:ea typeface="Noto Sans JP" pitchFamily="34" charset="-122"/>
+                          <a:cs typeface="Noto Sans JP" pitchFamily="34" charset="-120"/>
                         </a:rPr>
                         <a:t>○ 安定</a:t>
                       </a:r>
                       <a:endParaRPr lang="en-US" sz="1000" dirty="0">
-                        <a:latin typeface="Arial" charset="0"/>
-                        <a:ea typeface="Arial" charset="0"/>
-                        <a:cs typeface="Arial" charset="0"/>
+                        <a:latin typeface="Noto Sans JP" charset="0"/>
+                        <a:ea typeface="Noto Sans JP" charset="0"/>
+                        <a:cs typeface="Noto Sans JP" charset="0"/>
                       </a:endParaRPr>
                     </a:p>
                   </a:txBody>
@@ -11637,9 +11637,9 @@
                 <a:solidFill>
                   <a:srgbClr val="1E2761"/>
                 </a:solidFill>
-                <a:latin typeface="Arial" pitchFamily="34" charset="0"/>
-                <a:ea typeface="Arial" pitchFamily="34" charset="-122"/>
-                <a:cs typeface="Arial" pitchFamily="34" charset="-120"/>
+                <a:latin typeface="Noto Sans JP" pitchFamily="34" charset="0"/>
+                <a:ea typeface="Noto Sans JP" pitchFamily="34" charset="-122"/>
+                <a:cs typeface="Noto Sans JP" pitchFamily="34" charset="-120"/>
               </a:rPr>
               <a:t>差別化: </a:t>
             </a:r>
@@ -11651,9 +11651,9 @@
                 <a:solidFill>
                   <a:srgbClr val="1A1A2E"/>
                 </a:solidFill>
-                <a:latin typeface="Arial" pitchFamily="34" charset="0"/>
-                <a:ea typeface="Arial" pitchFamily="34" charset="-122"/>
-                <a:cs typeface="Arial" pitchFamily="34" charset="-120"/>
+                <a:latin typeface="Noto Sans JP" pitchFamily="34" charset="0"/>
+                <a:ea typeface="Noto Sans JP" pitchFamily="34" charset="-122"/>
+                <a:cs typeface="Noto Sans JP" pitchFamily="34" charset="-120"/>
               </a:rPr>
               <a:t>「提案するだけのAI」でも「高価な人間VA」でもない、</a:t>
             </a:r>
@@ -11665,9 +11665,9 @@
                 <a:solidFill>
                   <a:srgbClr val="4A90D9"/>
                 </a:solidFill>
-                <a:latin typeface="Arial" pitchFamily="34" charset="0"/>
-                <a:ea typeface="Arial" pitchFamily="34" charset="-122"/>
-                <a:cs typeface="Arial" pitchFamily="34" charset="-120"/>
+                <a:latin typeface="Noto Sans JP" pitchFamily="34" charset="0"/>
+                <a:ea typeface="Noto Sans JP" pitchFamily="34" charset="-122"/>
+                <a:cs typeface="Noto Sans JP" pitchFamily="34" charset="-120"/>
               </a:rPr>
               <a:t>月1万円で業務を実行できるAI秘書</a:t>
             </a:r>
@@ -11679,9 +11679,9 @@
                 <a:solidFill>
                   <a:srgbClr val="1A1A2E"/>
                 </a:solidFill>
-                <a:latin typeface="Arial" pitchFamily="34" charset="0"/>
-                <a:ea typeface="Arial" pitchFamily="34" charset="-122"/>
-                <a:cs typeface="Arial" pitchFamily="34" charset="-120"/>
+                <a:latin typeface="Noto Sans JP" pitchFamily="34" charset="0"/>
+                <a:ea typeface="Noto Sans JP" pitchFamily="34" charset="-122"/>
+                <a:cs typeface="Noto Sans JP" pitchFamily="34" charset="-120"/>
               </a:rPr>
               <a:t>。LINEという既存インフラ上で動くため導入障壁ゼロ。</a:t>
             </a:r>
@@ -11718,9 +11718,9 @@
                 <a:solidFill>
                   <a:srgbClr val="A0A8B4"/>
                 </a:solidFill>
-                <a:latin typeface="Arial" pitchFamily="34" charset="0"/>
-                <a:ea typeface="Arial" pitchFamily="34" charset="-122"/>
-                <a:cs typeface="Arial" pitchFamily="34" charset="-120"/>
+                <a:latin typeface="Noto Sans JP" pitchFamily="34" charset="0"/>
+                <a:ea typeface="Noto Sans JP" pitchFamily="34" charset="-122"/>
+                <a:cs typeface="Noto Sans JP" pitchFamily="34" charset="-120"/>
               </a:rPr>
               <a:t>人間VA料金: HELP YOU「オンライン秘書サービス比較15選」2025年。ChatGPT Plus: $20/月。Notion AI: $10/月。</a:t>
             </a:r>
@@ -11789,9 +11789,9 @@
                 <a:solidFill>
                   <a:srgbClr val="1E2761"/>
                 </a:solidFill>
-                <a:latin typeface="Arial" pitchFamily="34" charset="0"/>
-                <a:ea typeface="Arial" pitchFamily="34" charset="-122"/>
-                <a:cs typeface="Arial" pitchFamily="34" charset="-120"/>
+                <a:latin typeface="Noto Sans JP" pitchFamily="34" charset="0"/>
+                <a:ea typeface="Noto Sans JP" pitchFamily="34" charset="-122"/>
+                <a:cs typeface="Noto Sans JP" pitchFamily="34" charset="-120"/>
               </a:rPr>
               <a:t>リスク分析と対策</a:t>
             </a:r>
@@ -11848,9 +11848,9 @@
                 <a:solidFill>
                   <a:srgbClr val="FFFFFF"/>
                 </a:solidFill>
-                <a:latin typeface="Arial" pitchFamily="34" charset="0"/>
-                <a:ea typeface="Arial" pitchFamily="34" charset="-122"/>
-                <a:cs typeface="Arial" pitchFamily="34" charset="-120"/>
+                <a:latin typeface="Noto Sans JP" pitchFamily="34" charset="0"/>
+                <a:ea typeface="Noto Sans JP" pitchFamily="34" charset="-122"/>
+                <a:cs typeface="Noto Sans JP" pitchFamily="34" charset="-120"/>
               </a:rPr>
               <a:t>市場リスク</a:t>
             </a:r>
@@ -11907,9 +11907,9 @@
                 <a:solidFill>
                   <a:srgbClr val="1A1A2E"/>
                 </a:solidFill>
-                <a:latin typeface="Arial" pitchFamily="34" charset="0"/>
-                <a:ea typeface="Arial" pitchFamily="34" charset="-122"/>
-                <a:cs typeface="Arial" pitchFamily="34" charset="-120"/>
+                <a:latin typeface="Noto Sans JP" pitchFamily="34" charset="0"/>
+                <a:ea typeface="Noto Sans JP" pitchFamily="34" charset="-122"/>
+                <a:cs typeface="Noto Sans JP" pitchFamily="34" charset="-120"/>
               </a:rPr>
               <a:t>フリーランスのSaaS支出は62%が月3,000円以下。</a:t>
             </a:r>
@@ -11924,9 +11924,9 @@
                 <a:solidFill>
                   <a:srgbClr val="1A1A2E"/>
                 </a:solidFill>
-                <a:latin typeface="Arial" pitchFamily="34" charset="0"/>
-                <a:ea typeface="Arial" pitchFamily="34" charset="-122"/>
-                <a:cs typeface="Arial" pitchFamily="34" charset="-120"/>
+                <a:latin typeface="Noto Sans JP" pitchFamily="34" charset="0"/>
+                <a:ea typeface="Noto Sans JP" pitchFamily="34" charset="-122"/>
+                <a:cs typeface="Noto Sans JP" pitchFamily="34" charset="-120"/>
               </a:rPr>
               <a:t>月9,800円は高い価格帯。</a:t>
             </a:r>
@@ -11983,9 +11983,9 @@
                 <a:solidFill>
                   <a:srgbClr val="27AE60"/>
                 </a:solidFill>
-                <a:latin typeface="Arial" pitchFamily="34" charset="0"/>
-                <a:ea typeface="Arial" pitchFamily="34" charset="-122"/>
-                <a:cs typeface="Arial" pitchFamily="34" charset="-120"/>
+                <a:latin typeface="Noto Sans JP" pitchFamily="34" charset="0"/>
+                <a:ea typeface="Noto Sans JP" pitchFamily="34" charset="-122"/>
+                <a:cs typeface="Noto Sans JP" pitchFamily="34" charset="-120"/>
               </a:rPr>
               <a:t>無料トライアル→成果実感→有料転換の導線設計。</a:t>
             </a:r>
@@ -12000,9 +12000,9 @@
                 <a:solidFill>
                   <a:srgbClr val="27AE60"/>
                 </a:solidFill>
-                <a:latin typeface="Arial" pitchFamily="34" charset="0"/>
-                <a:ea typeface="Arial" pitchFamily="34" charset="-122"/>
-                <a:cs typeface="Arial" pitchFamily="34" charset="-120"/>
+                <a:latin typeface="Noto Sans JP" pitchFamily="34" charset="0"/>
+                <a:ea typeface="Noto Sans JP" pitchFamily="34" charset="-122"/>
+                <a:cs typeface="Noto Sans JP" pitchFamily="34" charset="-120"/>
               </a:rPr>
               <a:t>人間VA（月6万円〜）との比較で価値訴求。</a:t>
             </a:r>
@@ -12059,9 +12059,9 @@
                 <a:solidFill>
                   <a:srgbClr val="FFFFFF"/>
                 </a:solidFill>
-                <a:latin typeface="Arial" pitchFamily="34" charset="0"/>
-                <a:ea typeface="Arial" pitchFamily="34" charset="-122"/>
-                <a:cs typeface="Arial" pitchFamily="34" charset="-120"/>
+                <a:latin typeface="Noto Sans JP" pitchFamily="34" charset="0"/>
+                <a:ea typeface="Noto Sans JP" pitchFamily="34" charset="-122"/>
+                <a:cs typeface="Noto Sans JP" pitchFamily="34" charset="-120"/>
               </a:rPr>
               <a:t>技術リスク</a:t>
             </a:r>
@@ -12118,9 +12118,9 @@
                 <a:solidFill>
                   <a:srgbClr val="1A1A2E"/>
                 </a:solidFill>
-                <a:latin typeface="Arial" pitchFamily="34" charset="0"/>
-                <a:ea typeface="Arial" pitchFamily="34" charset="-122"/>
-                <a:cs typeface="Arial" pitchFamily="34" charset="-120"/>
+                <a:latin typeface="Noto Sans JP" pitchFamily="34" charset="0"/>
+                <a:ea typeface="Noto Sans JP" pitchFamily="34" charset="-122"/>
+                <a:cs typeface="Noto Sans JP" pitchFamily="34" charset="-120"/>
               </a:rPr>
               <a:t>AI API費用が利用量に比例して増加。</a:t>
             </a:r>
@@ -12135,9 +12135,9 @@
                 <a:solidFill>
                   <a:srgbClr val="1A1A2E"/>
                 </a:solidFill>
-                <a:latin typeface="Arial" pitchFamily="34" charset="0"/>
-                <a:ea typeface="Arial" pitchFamily="34" charset="-122"/>
-                <a:cs typeface="Arial" pitchFamily="34" charset="-120"/>
+                <a:latin typeface="Noto Sans JP" pitchFamily="34" charset="0"/>
+                <a:ea typeface="Noto Sans JP" pitchFamily="34" charset="-122"/>
+                <a:cs typeface="Noto Sans JP" pitchFamily="34" charset="-120"/>
               </a:rPr>
               <a:t>LLMの精度・幻覚問題。</a:t>
             </a:r>
@@ -12194,9 +12194,9 @@
                 <a:solidFill>
                   <a:srgbClr val="27AE60"/>
                 </a:solidFill>
-                <a:latin typeface="Arial" pitchFamily="34" charset="0"/>
-                <a:ea typeface="Arial" pitchFamily="34" charset="-122"/>
-                <a:cs typeface="Arial" pitchFamily="34" charset="-120"/>
+                <a:latin typeface="Noto Sans JP" pitchFamily="34" charset="0"/>
+                <a:ea typeface="Noto Sans JP" pitchFamily="34" charset="-122"/>
+                <a:cs typeface="Noto Sans JP" pitchFamily="34" charset="-120"/>
               </a:rPr>
               <a:t>プラン別の利用上限設定でコスト管理。</a:t>
             </a:r>
@@ -12211,9 +12211,9 @@
                 <a:solidFill>
                   <a:srgbClr val="27AE60"/>
                 </a:solidFill>
-                <a:latin typeface="Arial" pitchFamily="34" charset="0"/>
-                <a:ea typeface="Arial" pitchFamily="34" charset="-122"/>
-                <a:cs typeface="Arial" pitchFamily="34" charset="-120"/>
+                <a:latin typeface="Noto Sans JP" pitchFamily="34" charset="0"/>
+                <a:ea typeface="Noto Sans JP" pitchFamily="34" charset="-122"/>
+                <a:cs typeface="Noto Sans JP" pitchFamily="34" charset="-120"/>
               </a:rPr>
               <a:t>重要操作は確認ステップを挟む安全設計。</a:t>
             </a:r>
@@ -12270,9 +12270,9 @@
                 <a:solidFill>
                   <a:srgbClr val="FFFFFF"/>
                 </a:solidFill>
-                <a:latin typeface="Arial" pitchFamily="34" charset="0"/>
-                <a:ea typeface="Arial" pitchFamily="34" charset="-122"/>
-                <a:cs typeface="Arial" pitchFamily="34" charset="-120"/>
+                <a:latin typeface="Noto Sans JP" pitchFamily="34" charset="0"/>
+                <a:ea typeface="Noto Sans JP" pitchFamily="34" charset="-122"/>
+                <a:cs typeface="Noto Sans JP" pitchFamily="34" charset="-120"/>
               </a:rPr>
               <a:t>競合リスク</a:t>
             </a:r>
@@ -12329,9 +12329,9 @@
                 <a:solidFill>
                   <a:srgbClr val="1A1A2E"/>
                 </a:solidFill>
-                <a:latin typeface="Arial" pitchFamily="34" charset="0"/>
-                <a:ea typeface="Arial" pitchFamily="34" charset="-122"/>
-                <a:cs typeface="Arial" pitchFamily="34" charset="-120"/>
+                <a:latin typeface="Noto Sans JP" pitchFamily="34" charset="0"/>
+                <a:ea typeface="Noto Sans JP" pitchFamily="34" charset="-122"/>
+                <a:cs typeface="Noto Sans JP" pitchFamily="34" charset="-120"/>
               </a:rPr>
               <a:t>大手（LINE/OpenAI等）が類似機能を</a:t>
             </a:r>
@@ -12346,9 +12346,9 @@
                 <a:solidFill>
                   <a:srgbClr val="1A1A2E"/>
                 </a:solidFill>
-                <a:latin typeface="Arial" pitchFamily="34" charset="0"/>
-                <a:ea typeface="Arial" pitchFamily="34" charset="-122"/>
-                <a:cs typeface="Arial" pitchFamily="34" charset="-120"/>
+                <a:latin typeface="Noto Sans JP" pitchFamily="34" charset="0"/>
+                <a:ea typeface="Noto Sans JP" pitchFamily="34" charset="-122"/>
+                <a:cs typeface="Noto Sans JP" pitchFamily="34" charset="-120"/>
               </a:rPr>
               <a:t>標準搭載する可能性。</a:t>
             </a:r>
@@ -12405,9 +12405,9 @@
                 <a:solidFill>
                   <a:srgbClr val="27AE60"/>
                 </a:solidFill>
-                <a:latin typeface="Arial" pitchFamily="34" charset="0"/>
-                <a:ea typeface="Arial" pitchFamily="34" charset="-122"/>
-                <a:cs typeface="Arial" pitchFamily="34" charset="-120"/>
+                <a:latin typeface="Noto Sans JP" pitchFamily="34" charset="0"/>
+                <a:ea typeface="Noto Sans JP" pitchFamily="34" charset="-122"/>
+                <a:cs typeface="Noto Sans JP" pitchFamily="34" charset="-120"/>
               </a:rPr>
               <a:t>業務特化・日本のフリーランス文化への</a:t>
             </a:r>
@@ -12422,9 +12422,9 @@
                 <a:solidFill>
                   <a:srgbClr val="27AE60"/>
                 </a:solidFill>
-                <a:latin typeface="Arial" pitchFamily="34" charset="0"/>
-                <a:ea typeface="Arial" pitchFamily="34" charset="-122"/>
-                <a:cs typeface="Arial" pitchFamily="34" charset="-120"/>
+                <a:latin typeface="Noto Sans JP" pitchFamily="34" charset="0"/>
+                <a:ea typeface="Noto Sans JP" pitchFamily="34" charset="-122"/>
+                <a:cs typeface="Noto Sans JP" pitchFamily="34" charset="-120"/>
               </a:rPr>
               <a:t>深い適応で差別化。先行者利益の確保。</a:t>
             </a:r>
@@ -12481,9 +12481,9 @@
                 <a:solidFill>
                   <a:srgbClr val="FFFFFF"/>
                 </a:solidFill>
-                <a:latin typeface="Arial" pitchFamily="34" charset="0"/>
-                <a:ea typeface="Arial" pitchFamily="34" charset="-122"/>
-                <a:cs typeface="Arial" pitchFamily="34" charset="-120"/>
+                <a:latin typeface="Noto Sans JP" pitchFamily="34" charset="0"/>
+                <a:ea typeface="Noto Sans JP" pitchFamily="34" charset="-122"/>
+                <a:cs typeface="Noto Sans JP" pitchFamily="34" charset="-120"/>
               </a:rPr>
               <a:t>採用リスク</a:t>
             </a:r>
@@ -12540,9 +12540,9 @@
                 <a:solidFill>
                   <a:srgbClr val="1A1A2E"/>
                 </a:solidFill>
-                <a:latin typeface="Arial" pitchFamily="34" charset="0"/>
-                <a:ea typeface="Arial" pitchFamily="34" charset="-122"/>
-                <a:cs typeface="Arial" pitchFamily="34" charset="-120"/>
+                <a:latin typeface="Noto Sans JP" pitchFamily="34" charset="0"/>
+                <a:ea typeface="Noto Sans JP" pitchFamily="34" charset="-122"/>
+                <a:cs typeface="Noto Sans JP" pitchFamily="34" charset="-120"/>
               </a:rPr>
               <a:t>AI活用に興味なしが約5割。</a:t>
             </a:r>
@@ -12557,9 +12557,9 @@
                 <a:solidFill>
                   <a:srgbClr val="1A1A2E"/>
                 </a:solidFill>
-                <a:latin typeface="Arial" pitchFamily="34" charset="0"/>
-                <a:ea typeface="Arial" pitchFamily="34" charset="-122"/>
-                <a:cs typeface="Arial" pitchFamily="34" charset="-120"/>
+                <a:latin typeface="Noto Sans JP" pitchFamily="34" charset="0"/>
+                <a:ea typeface="Noto Sans JP" pitchFamily="34" charset="-122"/>
+                <a:cs typeface="Noto Sans JP" pitchFamily="34" charset="-120"/>
               </a:rPr>
               <a:t>中小企業AI導入率は14.9%。</a:t>
             </a:r>
@@ -12616,9 +12616,9 @@
                 <a:solidFill>
                   <a:srgbClr val="27AE60"/>
                 </a:solidFill>
-                <a:latin typeface="Arial" pitchFamily="34" charset="0"/>
-                <a:ea typeface="Arial" pitchFamily="34" charset="-122"/>
-                <a:cs typeface="Arial" pitchFamily="34" charset="-120"/>
+                <a:latin typeface="Noto Sans JP" pitchFamily="34" charset="0"/>
+                <a:ea typeface="Noto Sans JP" pitchFamily="34" charset="-122"/>
+                <a:cs typeface="Noto Sans JP" pitchFamily="34" charset="-120"/>
               </a:rPr>
               <a:t>「AI」を前面に出さず「LINE秘書」として訴求。</a:t>
             </a:r>
@@ -12633,9 +12633,9 @@
                 <a:solidFill>
                   <a:srgbClr val="27AE60"/>
                 </a:solidFill>
-                <a:latin typeface="Arial" pitchFamily="34" charset="0"/>
-                <a:ea typeface="Arial" pitchFamily="34" charset="-122"/>
-                <a:cs typeface="Arial" pitchFamily="34" charset="-120"/>
+                <a:latin typeface="Noto Sans JP" pitchFamily="34" charset="0"/>
+                <a:ea typeface="Noto Sans JP" pitchFamily="34" charset="-122"/>
+                <a:cs typeface="Noto Sans JP" pitchFamily="34" charset="-120"/>
               </a:rPr>
               <a:t>ITリテラシー高層から段階的に拡大。</a:t>
             </a:r>
@@ -12744,9 +12744,9 @@
                 <a:solidFill>
                   <a:srgbClr val="A0A8B4"/>
                 </a:solidFill>
-                <a:latin typeface="Arial" pitchFamily="34" charset="0"/>
-                <a:ea typeface="Arial" pitchFamily="34" charset="-122"/>
-                <a:cs typeface="Arial" pitchFamily="34" charset="-120"/>
+                <a:latin typeface="Noto Sans JP" pitchFamily="34" charset="0"/>
+                <a:ea typeface="Noto Sans JP" pitchFamily="34" charset="-122"/>
+                <a:cs typeface="Noto Sans JP" pitchFamily="34" charset="-120"/>
               </a:rPr>
               <a:t>出典: ランサーズ「フリーランス実態調査2024」（AI興味なし約5割）/ 野村総合研究所2025（中小企業AI導入率14.9%）/ フリマド2023（SaaS支出）</a:t>
             </a:r>
